--- a/Mini_Bench_Deployment.pptx
+++ b/Mini_Bench_Deployment.pptx
@@ -128,7 +128,18 @@
                 <a:uFillTx/>
                 <a:latin typeface="Arial"/>
               </a:rPr>
-              <a:t>Click to edit the notes format</a:t>
+              <a:t>Click to edit the notes </a:t>
+            </a:r>
+            <a:r>
+              <a:rPr lang="en-US" sz="2000" b="0" u="none" strike="noStrike">
+                <a:solidFill>
+                  <a:srgbClr val="000000"/>
+                </a:solidFill>
+                <a:effectLst/>
+                <a:uFillTx/>
+                <a:latin typeface="Arial"/>
+              </a:rPr>
+              <a:t>format</a:t>
             </a:r>
             <a:endParaRPr lang="en-US" sz="2000" b="0" u="none" strike="noStrike">
               <a:solidFill>
@@ -370,7 +381,7 @@
             <a:pPr indent="0" algn="r">
               <a:buNone/>
             </a:pPr>
-            <a:fld id="{1BBAF434-200A-47F2-8399-5563AA751049}" type="slidenum">
+            <a:fld id="{C949C564-2EAB-4544-B79B-6C6EFC5536AD}" type="slidenum">
               <a:rPr lang="en-US" sz="1400" b="0" u="none" strike="noStrike">
                 <a:solidFill>
                   <a:srgbClr val="000000"/>
@@ -428,7 +439,7 @@
         <p:spPr>
           <a:xfrm>
             <a:off x="685800" y="1143000"/>
-            <a:ext cx="5486040" cy="3085920"/>
+            <a:ext cx="5485680" cy="3085560"/>
           </a:xfrm>
           <a:prstGeom prst="rect">
             <a:avLst/>
@@ -451,7 +462,7 @@
         <p:spPr>
           <a:xfrm>
             <a:off x="685800" y="4400640"/>
-            <a:ext cx="5486040" cy="3600000"/>
+            <a:ext cx="5485680" cy="3599640"/>
           </a:xfrm>
           <a:prstGeom prst="rect">
             <a:avLst/>
@@ -493,7 +504,7 @@
         <p:spPr>
           <a:xfrm>
             <a:off x="3884760" y="8685360"/>
-            <a:ext cx="2971440" cy="458280"/>
+            <a:ext cx="2971080" cy="457920"/>
           </a:xfrm>
           <a:prstGeom prst="rect">
             <a:avLst/>
@@ -513,6 +524,9 @@
                 <a:spcPct val="100000"/>
               </a:lnSpc>
               <a:buNone/>
+              <a:tabLst>
+                <a:tab pos="0" algn="l"/>
+              </a:tabLst>
               <a:defRPr lang="en-US" sz="1200" b="0" u="none" strike="noStrike">
                 <a:solidFill>
                   <a:schemeClr val="dk1"/>
@@ -530,8 +544,11 @@
                 <a:spcPct val="100000"/>
               </a:lnSpc>
               <a:buNone/>
-            </a:pPr>
-            <a:fld id="{1B224C88-7185-41BC-8B42-47E5C6A57853}" type="slidenum">
+              <a:tabLst>
+                <a:tab pos="0" algn="l"/>
+              </a:tabLst>
+            </a:pPr>
+            <a:fld id="{271712BC-2525-4C12-9268-137DAB4C2944}" type="slidenum">
               <a:rPr lang="en-US" sz="1200" b="0" u="none" strike="noStrike">
                 <a:solidFill>
                   <a:schemeClr val="dk1"/>
@@ -589,7 +606,7 @@
         <p:spPr>
           <a:xfrm>
             <a:off x="685800" y="1143000"/>
-            <a:ext cx="5486040" cy="3085920"/>
+            <a:ext cx="5485680" cy="3085560"/>
           </a:xfrm>
           <a:prstGeom prst="rect">
             <a:avLst/>
@@ -612,7 +629,7 @@
         <p:spPr>
           <a:xfrm>
             <a:off x="685800" y="4400640"/>
-            <a:ext cx="5486040" cy="3600000"/>
+            <a:ext cx="5485680" cy="3599640"/>
           </a:xfrm>
           <a:prstGeom prst="rect">
             <a:avLst/>
@@ -654,7 +671,7 @@
         <p:spPr>
           <a:xfrm>
             <a:off x="3884760" y="8685360"/>
-            <a:ext cx="2971440" cy="458280"/>
+            <a:ext cx="2971080" cy="457920"/>
           </a:xfrm>
           <a:prstGeom prst="rect">
             <a:avLst/>
@@ -674,6 +691,9 @@
                 <a:spcPct val="100000"/>
               </a:lnSpc>
               <a:buNone/>
+              <a:tabLst>
+                <a:tab pos="0" algn="l"/>
+              </a:tabLst>
               <a:defRPr lang="en-US" sz="1200" b="0" u="none" strike="noStrike">
                 <a:solidFill>
                   <a:schemeClr val="dk1"/>
@@ -691,8 +711,11 @@
                 <a:spcPct val="100000"/>
               </a:lnSpc>
               <a:buNone/>
-            </a:pPr>
-            <a:fld id="{DE439837-7138-4D7C-9594-D64AEE33C714}" type="slidenum">
+              <a:tabLst>
+                <a:tab pos="0" algn="l"/>
+              </a:tabLst>
+            </a:pPr>
+            <a:fld id="{86A8F80D-E050-4C69-A267-AFCC20F2A44E}" type="slidenum">
               <a:rPr lang="en-US" sz="1200" b="0" u="none" strike="noStrike">
                 <a:solidFill>
                   <a:schemeClr val="dk1"/>
@@ -750,7 +773,7 @@
         <p:spPr>
           <a:xfrm>
             <a:off x="685800" y="1143000"/>
-            <a:ext cx="5486040" cy="3085920"/>
+            <a:ext cx="5485680" cy="3085560"/>
           </a:xfrm>
           <a:prstGeom prst="rect">
             <a:avLst/>
@@ -773,7 +796,7 @@
         <p:spPr>
           <a:xfrm>
             <a:off x="685800" y="4400640"/>
-            <a:ext cx="5486040" cy="3600000"/>
+            <a:ext cx="5485680" cy="3599640"/>
           </a:xfrm>
           <a:prstGeom prst="rect">
             <a:avLst/>
@@ -815,7 +838,7 @@
         <p:spPr>
           <a:xfrm>
             <a:off x="3884760" y="8685360"/>
-            <a:ext cx="2971440" cy="458280"/>
+            <a:ext cx="2971080" cy="457920"/>
           </a:xfrm>
           <a:prstGeom prst="rect">
             <a:avLst/>
@@ -835,6 +858,9 @@
                 <a:spcPct val="100000"/>
               </a:lnSpc>
               <a:buNone/>
+              <a:tabLst>
+                <a:tab pos="0" algn="l"/>
+              </a:tabLst>
               <a:defRPr lang="en-US" sz="1200" b="0" u="none" strike="noStrike">
                 <a:solidFill>
                   <a:schemeClr val="dk1"/>
@@ -852,8 +878,11 @@
                 <a:spcPct val="100000"/>
               </a:lnSpc>
               <a:buNone/>
-            </a:pPr>
-            <a:fld id="{5BBF9FB0-07EB-4872-BC04-E02319072C5C}" type="slidenum">
+              <a:tabLst>
+                <a:tab pos="0" algn="l"/>
+              </a:tabLst>
+            </a:pPr>
+            <a:fld id="{3A64A896-0B85-412C-9406-8DA079532CC5}" type="slidenum">
               <a:rPr lang="en-US" sz="1200" b="0" u="none" strike="noStrike">
                 <a:solidFill>
                   <a:schemeClr val="dk1"/>
@@ -911,7 +940,7 @@
         <p:spPr>
           <a:xfrm>
             <a:off x="685800" y="1143000"/>
-            <a:ext cx="5486040" cy="3085920"/>
+            <a:ext cx="5485680" cy="3085560"/>
           </a:xfrm>
           <a:prstGeom prst="rect">
             <a:avLst/>
@@ -934,7 +963,7 @@
         <p:spPr>
           <a:xfrm>
             <a:off x="685800" y="4400640"/>
-            <a:ext cx="5486040" cy="3600000"/>
+            <a:ext cx="5485680" cy="3599640"/>
           </a:xfrm>
           <a:prstGeom prst="rect">
             <a:avLst/>
@@ -976,7 +1005,7 @@
         <p:spPr>
           <a:xfrm>
             <a:off x="3884760" y="8685360"/>
-            <a:ext cx="2971440" cy="458280"/>
+            <a:ext cx="2971080" cy="457920"/>
           </a:xfrm>
           <a:prstGeom prst="rect">
             <a:avLst/>
@@ -996,6 +1025,9 @@
                 <a:spcPct val="100000"/>
               </a:lnSpc>
               <a:buNone/>
+              <a:tabLst>
+                <a:tab pos="0" algn="l"/>
+              </a:tabLst>
               <a:defRPr lang="en-US" sz="1200" b="0" u="none" strike="noStrike">
                 <a:solidFill>
                   <a:schemeClr val="dk1"/>
@@ -1013,8 +1045,11 @@
                 <a:spcPct val="100000"/>
               </a:lnSpc>
               <a:buNone/>
-            </a:pPr>
-            <a:fld id="{C18DE5DF-50B2-4222-9DEA-329A79A17D20}" type="slidenum">
+              <a:tabLst>
+                <a:tab pos="0" algn="l"/>
+              </a:tabLst>
+            </a:pPr>
+            <a:fld id="{BB3A48EB-0EBB-4B12-97ED-57E5DC1374A2}" type="slidenum">
               <a:rPr lang="en-US" sz="1200" b="0" u="none" strike="noStrike">
                 <a:solidFill>
                   <a:schemeClr val="dk1"/>
@@ -1072,7 +1107,7 @@
         <p:spPr>
           <a:xfrm>
             <a:off x="685800" y="1143000"/>
-            <a:ext cx="5486040" cy="3085920"/>
+            <a:ext cx="5485680" cy="3085560"/>
           </a:xfrm>
           <a:prstGeom prst="rect">
             <a:avLst/>
@@ -1095,7 +1130,7 @@
         <p:spPr>
           <a:xfrm>
             <a:off x="685800" y="4400640"/>
-            <a:ext cx="5486040" cy="3600000"/>
+            <a:ext cx="5485680" cy="3599640"/>
           </a:xfrm>
           <a:prstGeom prst="rect">
             <a:avLst/>
@@ -1137,7 +1172,7 @@
         <p:spPr>
           <a:xfrm>
             <a:off x="3884760" y="8685360"/>
-            <a:ext cx="2971440" cy="458280"/>
+            <a:ext cx="2971080" cy="457920"/>
           </a:xfrm>
           <a:prstGeom prst="rect">
             <a:avLst/>
@@ -1157,6 +1192,9 @@
                 <a:spcPct val="100000"/>
               </a:lnSpc>
               <a:buNone/>
+              <a:tabLst>
+                <a:tab pos="0" algn="l"/>
+              </a:tabLst>
               <a:defRPr lang="en-US" sz="1200" b="0" u="none" strike="noStrike">
                 <a:solidFill>
                   <a:schemeClr val="dk1"/>
@@ -1174,8 +1212,11 @@
                 <a:spcPct val="100000"/>
               </a:lnSpc>
               <a:buNone/>
-            </a:pPr>
-            <a:fld id="{FAB05450-E5B5-4021-8D39-D46FE112CEBA}" type="slidenum">
+              <a:tabLst>
+                <a:tab pos="0" algn="l"/>
+              </a:tabLst>
+            </a:pPr>
+            <a:fld id="{FB05B543-8F77-48B2-813C-9C28F12B1889}" type="slidenum">
               <a:rPr lang="en-US" sz="1200" b="0" u="none" strike="noStrike">
                 <a:solidFill>
                   <a:schemeClr val="dk1"/>
@@ -1233,7 +1274,7 @@
         <p:spPr>
           <a:xfrm>
             <a:off x="685800" y="1143000"/>
-            <a:ext cx="5486040" cy="3085920"/>
+            <a:ext cx="5485680" cy="3085560"/>
           </a:xfrm>
           <a:prstGeom prst="rect">
             <a:avLst/>
@@ -1256,7 +1297,7 @@
         <p:spPr>
           <a:xfrm>
             <a:off x="685800" y="4400640"/>
-            <a:ext cx="5486040" cy="3600000"/>
+            <a:ext cx="5485680" cy="3599640"/>
           </a:xfrm>
           <a:prstGeom prst="rect">
             <a:avLst/>
@@ -1298,7 +1339,7 @@
         <p:spPr>
           <a:xfrm>
             <a:off x="3884760" y="8685360"/>
-            <a:ext cx="2971440" cy="458280"/>
+            <a:ext cx="2971080" cy="457920"/>
           </a:xfrm>
           <a:prstGeom prst="rect">
             <a:avLst/>
@@ -1318,6 +1359,9 @@
                 <a:spcPct val="100000"/>
               </a:lnSpc>
               <a:buNone/>
+              <a:tabLst>
+                <a:tab pos="0" algn="l"/>
+              </a:tabLst>
               <a:defRPr lang="en-US" sz="1200" b="0" u="none" strike="noStrike">
                 <a:solidFill>
                   <a:schemeClr val="dk1"/>
@@ -1335,8 +1379,11 @@
                 <a:spcPct val="100000"/>
               </a:lnSpc>
               <a:buNone/>
-            </a:pPr>
-            <a:fld id="{B02F10E4-9B98-4773-9C6B-5A32D2B0A396}" type="slidenum">
+              <a:tabLst>
+                <a:tab pos="0" algn="l"/>
+              </a:tabLst>
+            </a:pPr>
+            <a:fld id="{A46958FA-818D-4356-A036-561D9D7D0FCA}" type="slidenum">
               <a:rPr lang="en-US" sz="1200" b="0" u="none" strike="noStrike">
                 <a:solidFill>
                   <a:schemeClr val="dk1"/>
@@ -1394,7 +1441,7 @@
         <p:spPr>
           <a:xfrm>
             <a:off x="685800" y="1143000"/>
-            <a:ext cx="5486040" cy="3085920"/>
+            <a:ext cx="5485680" cy="3085560"/>
           </a:xfrm>
           <a:prstGeom prst="rect">
             <a:avLst/>
@@ -1417,7 +1464,7 @@
         <p:spPr>
           <a:xfrm>
             <a:off x="685800" y="4400640"/>
-            <a:ext cx="5486040" cy="3600000"/>
+            <a:ext cx="5485680" cy="3599640"/>
           </a:xfrm>
           <a:prstGeom prst="rect">
             <a:avLst/>
@@ -1459,7 +1506,7 @@
         <p:spPr>
           <a:xfrm>
             <a:off x="3884760" y="8685360"/>
-            <a:ext cx="2971440" cy="458280"/>
+            <a:ext cx="2971080" cy="457920"/>
           </a:xfrm>
           <a:prstGeom prst="rect">
             <a:avLst/>
@@ -1479,6 +1526,9 @@
                 <a:spcPct val="100000"/>
               </a:lnSpc>
               <a:buNone/>
+              <a:tabLst>
+                <a:tab pos="0" algn="l"/>
+              </a:tabLst>
               <a:defRPr lang="en-US" sz="1200" b="0" u="none" strike="noStrike">
                 <a:solidFill>
                   <a:schemeClr val="dk1"/>
@@ -1496,8 +1546,11 @@
                 <a:spcPct val="100000"/>
               </a:lnSpc>
               <a:buNone/>
-            </a:pPr>
-            <a:fld id="{5E2B492F-876E-4250-BA10-DB9296D6E478}" type="slidenum">
+              <a:tabLst>
+                <a:tab pos="0" algn="l"/>
+              </a:tabLst>
+            </a:pPr>
+            <a:fld id="{7E9A65C0-E1DC-47FE-A331-DC11FEEB3E19}" type="slidenum">
               <a:rPr lang="en-US" sz="1200" b="0" u="none" strike="noStrike">
                 <a:solidFill>
                   <a:schemeClr val="dk1"/>
@@ -1601,6 +1654,9 @@
           <a:lstStyle>
             <a:lvl1pPr indent="0" algn="l">
               <a:buNone/>
+              <a:tabLst>
+                <a:tab pos="0" algn="l"/>
+              </a:tabLst>
               <a:defRPr lang="en-US" sz="1800" b="0" u="none" strike="noStrike">
                 <a:solidFill>
                   <a:schemeClr val="dk1"/>
@@ -1614,6 +1670,9 @@
           <a:p>
             <a:pPr indent="0" algn="l">
               <a:buNone/>
+              <a:tabLst>
+                <a:tab pos="0" algn="l"/>
+              </a:tabLst>
             </a:pPr>
             <a:r>
               <a:rPr lang="en-US" sz="1800" b="0" u="none" strike="noStrike">
@@ -1624,7 +1683,7 @@
                 <a:uFillTx/>
                 <a:latin typeface="Calibri"/>
               </a:rPr>
-              <a:t>C</a:t>
+              <a:t>Click to edit the title text </a:t>
             </a:r>
             <a:r>
               <a:rPr lang="en-US" sz="1800" b="0" u="none" strike="noStrike">
@@ -1635,260 +1694,7 @@
                 <a:uFillTx/>
                 <a:latin typeface="Calibri"/>
               </a:rPr>
-              <a:t>li</a:t>
-            </a:r>
-            <a:r>
-              <a:rPr lang="en-US" sz="1800" b="0" u="none" strike="noStrike">
-                <a:solidFill>
-                  <a:schemeClr val="dk1"/>
-                </a:solidFill>
-                <a:effectLst/>
-                <a:uFillTx/>
-                <a:latin typeface="Calibri"/>
-              </a:rPr>
-              <a:t>c</a:t>
-            </a:r>
-            <a:r>
-              <a:rPr lang="en-US" sz="1800" b="0" u="none" strike="noStrike">
-                <a:solidFill>
-                  <a:schemeClr val="dk1"/>
-                </a:solidFill>
-                <a:effectLst/>
-                <a:uFillTx/>
-                <a:latin typeface="Calibri"/>
-              </a:rPr>
-              <a:t>k </a:t>
-            </a:r>
-            <a:r>
-              <a:rPr lang="en-US" sz="1800" b="0" u="none" strike="noStrike">
-                <a:solidFill>
-                  <a:schemeClr val="dk1"/>
-                </a:solidFill>
-                <a:effectLst/>
-                <a:uFillTx/>
-                <a:latin typeface="Calibri"/>
-              </a:rPr>
-              <a:t>t</a:t>
-            </a:r>
-            <a:r>
-              <a:rPr lang="en-US" sz="1800" b="0" u="none" strike="noStrike">
-                <a:solidFill>
-                  <a:schemeClr val="dk1"/>
-                </a:solidFill>
-                <a:effectLst/>
-                <a:uFillTx/>
-                <a:latin typeface="Calibri"/>
-              </a:rPr>
-              <a:t>o </a:t>
-            </a:r>
-            <a:r>
-              <a:rPr lang="en-US" sz="1800" b="0" u="none" strike="noStrike">
-                <a:solidFill>
-                  <a:schemeClr val="dk1"/>
-                </a:solidFill>
-                <a:effectLst/>
-                <a:uFillTx/>
-                <a:latin typeface="Calibri"/>
-              </a:rPr>
-              <a:t>e</a:t>
-            </a:r>
-            <a:r>
-              <a:rPr lang="en-US" sz="1800" b="0" u="none" strike="noStrike">
-                <a:solidFill>
-                  <a:schemeClr val="dk1"/>
-                </a:solidFill>
-                <a:effectLst/>
-                <a:uFillTx/>
-                <a:latin typeface="Calibri"/>
-              </a:rPr>
-              <a:t>d</a:t>
-            </a:r>
-            <a:r>
-              <a:rPr lang="en-US" sz="1800" b="0" u="none" strike="noStrike">
-                <a:solidFill>
-                  <a:schemeClr val="dk1"/>
-                </a:solidFill>
-                <a:effectLst/>
-                <a:uFillTx/>
-                <a:latin typeface="Calibri"/>
-              </a:rPr>
-              <a:t>it </a:t>
-            </a:r>
-            <a:r>
-              <a:rPr lang="en-US" sz="1800" b="0" u="none" strike="noStrike">
-                <a:solidFill>
-                  <a:schemeClr val="dk1"/>
-                </a:solidFill>
-                <a:effectLst/>
-                <a:uFillTx/>
-                <a:latin typeface="Calibri"/>
-              </a:rPr>
-              <a:t>t</a:t>
-            </a:r>
-            <a:r>
-              <a:rPr lang="en-US" sz="1800" b="0" u="none" strike="noStrike">
-                <a:solidFill>
-                  <a:schemeClr val="dk1"/>
-                </a:solidFill>
-                <a:effectLst/>
-                <a:uFillTx/>
-                <a:latin typeface="Calibri"/>
-              </a:rPr>
-              <a:t>h</a:t>
-            </a:r>
-            <a:r>
-              <a:rPr lang="en-US" sz="1800" b="0" u="none" strike="noStrike">
-                <a:solidFill>
-                  <a:schemeClr val="dk1"/>
-                </a:solidFill>
-                <a:effectLst/>
-                <a:uFillTx/>
-                <a:latin typeface="Calibri"/>
-              </a:rPr>
-              <a:t>e </a:t>
-            </a:r>
-            <a:r>
-              <a:rPr lang="en-US" sz="1800" b="0" u="none" strike="noStrike">
-                <a:solidFill>
-                  <a:schemeClr val="dk1"/>
-                </a:solidFill>
-                <a:effectLst/>
-                <a:uFillTx/>
-                <a:latin typeface="Calibri"/>
-              </a:rPr>
-              <a:t>ti</a:t>
-            </a:r>
-            <a:r>
-              <a:rPr lang="en-US" sz="1800" b="0" u="none" strike="noStrike">
-                <a:solidFill>
-                  <a:schemeClr val="dk1"/>
-                </a:solidFill>
-                <a:effectLst/>
-                <a:uFillTx/>
-                <a:latin typeface="Calibri"/>
-              </a:rPr>
-              <a:t>tl</a:t>
-            </a:r>
-            <a:r>
-              <a:rPr lang="en-US" sz="1800" b="0" u="none" strike="noStrike">
-                <a:solidFill>
-                  <a:schemeClr val="dk1"/>
-                </a:solidFill>
-                <a:effectLst/>
-                <a:uFillTx/>
-                <a:latin typeface="Calibri"/>
-              </a:rPr>
-              <a:t>e </a:t>
-            </a:r>
-            <a:r>
-              <a:rPr lang="en-US" sz="1800" b="0" u="none" strike="noStrike">
-                <a:solidFill>
-                  <a:schemeClr val="dk1"/>
-                </a:solidFill>
-                <a:effectLst/>
-                <a:uFillTx/>
-                <a:latin typeface="Calibri"/>
-              </a:rPr>
-              <a:t>t</a:t>
-            </a:r>
-            <a:r>
-              <a:rPr lang="en-US" sz="1800" b="0" u="none" strike="noStrike">
-                <a:solidFill>
-                  <a:schemeClr val="dk1"/>
-                </a:solidFill>
-                <a:effectLst/>
-                <a:uFillTx/>
-                <a:latin typeface="Calibri"/>
-              </a:rPr>
-              <a:t>e</a:t>
-            </a:r>
-            <a:r>
-              <a:rPr lang="en-US" sz="1800" b="0" u="none" strike="noStrike">
-                <a:solidFill>
-                  <a:schemeClr val="dk1"/>
-                </a:solidFill>
-                <a:effectLst/>
-                <a:uFillTx/>
-                <a:latin typeface="Calibri"/>
-              </a:rPr>
-              <a:t>x</a:t>
-            </a:r>
-            <a:r>
-              <a:rPr lang="en-US" sz="1800" b="0" u="none" strike="noStrike">
-                <a:solidFill>
-                  <a:schemeClr val="dk1"/>
-                </a:solidFill>
-                <a:effectLst/>
-                <a:uFillTx/>
-                <a:latin typeface="Calibri"/>
-              </a:rPr>
-              <a:t>t </a:t>
-            </a:r>
-            <a:r>
-              <a:rPr lang="en-US" sz="1800" b="0" u="none" strike="noStrike">
-                <a:solidFill>
-                  <a:schemeClr val="dk1"/>
-                </a:solidFill>
-                <a:effectLst/>
-                <a:uFillTx/>
-                <a:latin typeface="Calibri"/>
-              </a:rPr>
-              <a:t>f</a:t>
-            </a:r>
-            <a:r>
-              <a:rPr lang="en-US" sz="1800" b="0" u="none" strike="noStrike">
-                <a:solidFill>
-                  <a:schemeClr val="dk1"/>
-                </a:solidFill>
-                <a:effectLst/>
-                <a:uFillTx/>
-                <a:latin typeface="Calibri"/>
-              </a:rPr>
-              <a:t>o</a:t>
-            </a:r>
-            <a:r>
-              <a:rPr lang="en-US" sz="1800" b="0" u="none" strike="noStrike">
-                <a:solidFill>
-                  <a:schemeClr val="dk1"/>
-                </a:solidFill>
-                <a:effectLst/>
-                <a:uFillTx/>
-                <a:latin typeface="Calibri"/>
-              </a:rPr>
-              <a:t>r</a:t>
-            </a:r>
-            <a:r>
-              <a:rPr lang="en-US" sz="1800" b="0" u="none" strike="noStrike">
-                <a:solidFill>
-                  <a:schemeClr val="dk1"/>
-                </a:solidFill>
-                <a:effectLst/>
-                <a:uFillTx/>
-                <a:latin typeface="Calibri"/>
-              </a:rPr>
-              <a:t>m</a:t>
-            </a:r>
-            <a:r>
-              <a:rPr lang="en-US" sz="1800" b="0" u="none" strike="noStrike">
-                <a:solidFill>
-                  <a:schemeClr val="dk1"/>
-                </a:solidFill>
-                <a:effectLst/>
-                <a:uFillTx/>
-                <a:latin typeface="Calibri"/>
-              </a:rPr>
-              <a:t>a</a:t>
-            </a:r>
-            <a:r>
-              <a:rPr lang="en-US" sz="1800" b="0" u="none" strike="noStrike">
-                <a:solidFill>
-                  <a:schemeClr val="dk1"/>
-                </a:solidFill>
-                <a:effectLst/>
-                <a:uFillTx/>
-                <a:latin typeface="Calibri"/>
-              </a:rPr>
-              <a:t>t</a:t>
+              <a:t>format</a:t>
             </a:r>
             <a:endParaRPr lang="en-US" sz="1800" b="0" u="none" strike="noStrike">
               <a:solidFill>
@@ -2064,7 +1870,7 @@
             </a:lvl7pPr>
           </a:lstStyle>
           <a:p>
-            <a:pPr marL="432000" indent="-324000" algn="l">
+            <a:pPr indent="-324000" algn="l">
               <a:spcBef>
                 <a:spcPts val="1417"/>
               </a:spcBef>
@@ -2335,7 +2141,7 @@
         <p:spPr>
           <a:xfrm>
             <a:off x="0" y="0"/>
-            <a:ext cx="12191400" cy="6857640"/>
+            <a:ext cx="12191040" cy="6857280"/>
           </a:xfrm>
           <a:prstGeom prst="rect">
             <a:avLst/>
@@ -2355,7 +2161,7 @@
         <p:spPr>
           <a:xfrm>
             <a:off x="0" y="0"/>
-            <a:ext cx="91080" cy="6857640"/>
+            <a:ext cx="90720" cy="6857280"/>
           </a:xfrm>
           <a:prstGeom prst="rect">
             <a:avLst/>
@@ -2374,7 +2180,7 @@
           <a:fontRef idx="minor"/>
         </p:style>
         <p:txBody>
-          <a:bodyPr lIns="90000" tIns="45000" rIns="90000" bIns="45000" anchor="t">
+          <a:bodyPr lIns="45360" tIns="45000" rIns="45360" bIns="45000" anchor="t">
             <a:noAutofit/>
           </a:bodyPr>
           <a:p>
@@ -2398,7 +2204,7 @@
         <p:spPr>
           <a:xfrm>
             <a:off x="594360" y="384120"/>
-            <a:ext cx="3474360" cy="319680"/>
+            <a:ext cx="3474000" cy="319320"/>
           </a:xfrm>
           <a:prstGeom prst="rect">
             <a:avLst/>
@@ -2463,7 +2269,7 @@
         <p:spPr>
           <a:xfrm>
             <a:off x="8732520" y="384120"/>
-            <a:ext cx="2651400" cy="703800"/>
+            <a:ext cx="2651040" cy="703440"/>
           </a:xfrm>
           <a:prstGeom prst="rect">
             <a:avLst/>
@@ -2483,7 +2289,7 @@
         <p:spPr>
           <a:xfrm>
             <a:off x="621720" y="1325880"/>
-            <a:ext cx="9600840" cy="1371240"/>
+            <a:ext cx="9600480" cy="1370880"/>
           </a:xfrm>
           <a:prstGeom prst="rect">
             <a:avLst/>
@@ -2610,7 +2416,7 @@
         <p:spPr>
           <a:xfrm>
             <a:off x="658440" y="2697480"/>
-            <a:ext cx="8686440" cy="365400"/>
+            <a:ext cx="8686080" cy="365040"/>
           </a:xfrm>
           <a:prstGeom prst="rect">
             <a:avLst/>
@@ -2695,7 +2501,7 @@
         <p:spPr>
           <a:xfrm>
             <a:off x="658440" y="3246120"/>
-            <a:ext cx="6171840" cy="273960"/>
+            <a:ext cx="6171480" cy="273600"/>
           </a:xfrm>
           <a:prstGeom prst="rect">
             <a:avLst/>
@@ -2756,7 +2562,7 @@
         <p:spPr>
           <a:xfrm>
             <a:off x="658440" y="3547800"/>
-            <a:ext cx="6674760" cy="1005480"/>
+            <a:ext cx="6674400" cy="1005120"/>
           </a:xfrm>
           <a:prstGeom prst="rect">
             <a:avLst/>
@@ -2889,7 +2695,7 @@
         <p:spPr>
           <a:xfrm>
             <a:off x="658440" y="5166360"/>
-            <a:ext cx="6766200" cy="273960"/>
+            <a:ext cx="6765840" cy="273600"/>
           </a:xfrm>
           <a:prstGeom prst="rect">
             <a:avLst/>
@@ -2950,7 +2756,7 @@
         <p:spPr>
           <a:xfrm>
             <a:off x="658440" y="5440680"/>
-            <a:ext cx="8229240" cy="365400"/>
+            <a:ext cx="8228880" cy="365040"/>
           </a:xfrm>
           <a:prstGeom prst="rect">
             <a:avLst/>
@@ -3084,7 +2890,7 @@
         <p:spPr>
           <a:xfrm>
             <a:off x="0" y="0"/>
-            <a:ext cx="91080" cy="6857640"/>
+            <a:ext cx="90720" cy="6857280"/>
           </a:xfrm>
           <a:prstGeom prst="rect">
             <a:avLst/>
@@ -3103,7 +2909,7 @@
           <a:fontRef idx="minor"/>
         </p:style>
         <p:txBody>
-          <a:bodyPr lIns="90000" tIns="45000" rIns="90000" bIns="45000" anchor="t">
+          <a:bodyPr lIns="45360" tIns="45000" rIns="45360" bIns="45000" anchor="t">
             <a:noAutofit/>
           </a:bodyPr>
           <a:p>
@@ -3127,7 +2933,7 @@
         <p:spPr>
           <a:xfrm>
             <a:off x="594360" y="384120"/>
-            <a:ext cx="10789560" cy="594000"/>
+            <a:ext cx="10789200" cy="593640"/>
           </a:xfrm>
           <a:prstGeom prst="rect">
             <a:avLst/>
@@ -3200,7 +3006,7 @@
         <p:spPr>
           <a:xfrm>
             <a:off x="594360" y="1417320"/>
-            <a:ext cx="5257440" cy="1599840"/>
+            <a:ext cx="5257080" cy="1599480"/>
           </a:xfrm>
           <a:prstGeom prst="roundRect">
             <a:avLst>
@@ -3255,7 +3061,7 @@
         <p:spPr>
           <a:xfrm>
             <a:off x="850320" y="1673280"/>
-            <a:ext cx="502560" cy="502560"/>
+            <a:ext cx="502200" cy="502200"/>
           </a:xfrm>
           <a:prstGeom prst="ellipse">
             <a:avLst/>
@@ -3302,7 +3108,7 @@
         <p:spPr>
           <a:xfrm>
             <a:off x="905760" y="1728720"/>
-            <a:ext cx="392040" cy="392040"/>
+            <a:ext cx="391680" cy="391680"/>
           </a:xfrm>
           <a:prstGeom prst="rect">
             <a:avLst/>
@@ -3322,7 +3128,7 @@
         <p:spPr>
           <a:xfrm>
             <a:off x="1508760" y="1618560"/>
-            <a:ext cx="4114440" cy="548280"/>
+            <a:ext cx="4114080" cy="547920"/>
           </a:xfrm>
           <a:prstGeom prst="rect">
             <a:avLst/>
@@ -3361,19 +3167,7 @@
                 <a:latin typeface="Aptos"/>
                 <a:ea typeface="Aptos"/>
               </a:rPr>
-              <a:t>Manual, Spreadsheet-</a:t>
-            </a:r>
-            <a:r>
-              <a:rPr lang="en-US" sz="1500" b="1" u="none" strike="noStrike">
-                <a:solidFill>
-                  <a:srgbClr val="232D28"/>
-                </a:solidFill>
-                <a:effectLst/>
-                <a:uFillTx/>
-                <a:latin typeface="Aptos"/>
-                <a:ea typeface="Aptos"/>
-              </a:rPr>
-              <a:t>Based Staffing</a:t>
+              <a:t>Manual, Spreadsheet-Based Staffing</a:t>
             </a:r>
             <a:endParaRPr lang="en-US" sz="1500" b="0" u="none" strike="noStrike">
               <a:solidFill>
@@ -3395,7 +3189,7 @@
         <p:spPr>
           <a:xfrm>
             <a:off x="868680" y="2286000"/>
-            <a:ext cx="4708800" cy="639720"/>
+            <a:ext cx="4708440" cy="639360"/>
           </a:xfrm>
           <a:prstGeom prst="rect">
             <a:avLst/>
@@ -3434,43 +3228,7 @@
                 <a:latin typeface="Aptos"/>
                 <a:ea typeface="Aptos"/>
               </a:rPr>
-              <a:t>Bench allocation decisions </a:t>
-            </a:r>
-            <a:r>
-              <a:rPr lang="en-US" sz="1300" b="0" u="none" strike="noStrike">
-                <a:solidFill>
-                  <a:srgbClr val="5B6660"/>
-                </a:solidFill>
-                <a:effectLst/>
-                <a:uFillTx/>
-                <a:latin typeface="Aptos"/>
-                <a:ea typeface="Aptos"/>
-              </a:rPr>
-              <a:t>rely on manual spreadsheet </a:t>
-            </a:r>
-            <a:r>
-              <a:rPr lang="en-US" sz="1300" b="0" u="none" strike="noStrike">
-                <a:solidFill>
-                  <a:srgbClr val="5B6660"/>
-                </a:solidFill>
-                <a:effectLst/>
-                <a:uFillTx/>
-                <a:latin typeface="Aptos"/>
-                <a:ea typeface="Aptos"/>
-              </a:rPr>
-              <a:t>tracking, slowing </a:t>
-            </a:r>
-            <a:r>
-              <a:rPr lang="en-US" sz="1300" b="0" u="none" strike="noStrike">
-                <a:solidFill>
-                  <a:srgbClr val="5B6660"/>
-                </a:solidFill>
-                <a:effectLst/>
-                <a:uFillTx/>
-                <a:latin typeface="Aptos"/>
-                <a:ea typeface="Aptos"/>
-              </a:rPr>
-              <a:t>responsiveness.</a:t>
+              <a:t>Bench allocation decisions rely on manual spreadsheet tracking, slowing responsiveness.</a:t>
             </a:r>
             <a:endParaRPr lang="en-US" sz="1300" b="0" u="none" strike="noStrike">
               <a:solidFill>
@@ -3492,7 +3250,7 @@
         <p:spPr>
           <a:xfrm>
             <a:off x="6172200" y="1417320"/>
-            <a:ext cx="5257440" cy="1599840"/>
+            <a:ext cx="5257080" cy="1599480"/>
           </a:xfrm>
           <a:prstGeom prst="roundRect">
             <a:avLst>
@@ -3547,7 +3305,7 @@
         <p:spPr>
           <a:xfrm>
             <a:off x="6428160" y="1673280"/>
-            <a:ext cx="502560" cy="502560"/>
+            <a:ext cx="502200" cy="502200"/>
           </a:xfrm>
           <a:prstGeom prst="ellipse">
             <a:avLst/>
@@ -3594,7 +3352,7 @@
         <p:spPr>
           <a:xfrm>
             <a:off x="6483600" y="1728720"/>
-            <a:ext cx="392040" cy="392040"/>
+            <a:ext cx="391680" cy="391680"/>
           </a:xfrm>
           <a:prstGeom prst="rect">
             <a:avLst/>
@@ -3614,7 +3372,7 @@
         <p:spPr>
           <a:xfrm>
             <a:off x="7086600" y="1618560"/>
-            <a:ext cx="4114440" cy="548280"/>
+            <a:ext cx="4114080" cy="547920"/>
           </a:xfrm>
           <a:prstGeom prst="rect">
             <a:avLst/>
@@ -3675,7 +3433,7 @@
         <p:spPr>
           <a:xfrm>
             <a:off x="6446520" y="2286000"/>
-            <a:ext cx="4708800" cy="639720"/>
+            <a:ext cx="4708440" cy="639360"/>
           </a:xfrm>
           <a:prstGeom prst="rect">
             <a:avLst/>
@@ -3736,7 +3494,7 @@
         <p:spPr>
           <a:xfrm>
             <a:off x="594360" y="3200400"/>
-            <a:ext cx="5257440" cy="1599840"/>
+            <a:ext cx="5257080" cy="1599480"/>
           </a:xfrm>
           <a:prstGeom prst="roundRect">
             <a:avLst>
@@ -3791,7 +3549,7 @@
         <p:spPr>
           <a:xfrm>
             <a:off x="850320" y="3456360"/>
-            <a:ext cx="502560" cy="502560"/>
+            <a:ext cx="502200" cy="502200"/>
           </a:xfrm>
           <a:prstGeom prst="ellipse">
             <a:avLst/>
@@ -3838,7 +3596,7 @@
         <p:spPr>
           <a:xfrm>
             <a:off x="905760" y="3511800"/>
-            <a:ext cx="392040" cy="392040"/>
+            <a:ext cx="391680" cy="391680"/>
           </a:xfrm>
           <a:prstGeom prst="rect">
             <a:avLst/>
@@ -3858,7 +3616,7 @@
         <p:spPr>
           <a:xfrm>
             <a:off x="1508760" y="3401640"/>
-            <a:ext cx="4114440" cy="548280"/>
+            <a:ext cx="4114080" cy="547920"/>
           </a:xfrm>
           <a:prstGeom prst="rect">
             <a:avLst/>
@@ -3919,7 +3677,7 @@
         <p:spPr>
           <a:xfrm>
             <a:off x="868680" y="4069080"/>
-            <a:ext cx="4708800" cy="639720"/>
+            <a:ext cx="4708440" cy="639360"/>
           </a:xfrm>
           <a:prstGeom prst="rect">
             <a:avLst/>
@@ -3958,19 +3716,7 @@
                 <a:latin typeface="Aptos"/>
                 <a:ea typeface="Aptos"/>
               </a:rPr>
-              <a:t>Idle bench time directly increases organizational cost </a:t>
-            </a:r>
-            <a:r>
-              <a:rPr lang="en-US" sz="1300" b="0" u="none" strike="noStrike">
-                <a:solidFill>
-                  <a:srgbClr val="5B6660"/>
-                </a:solidFill>
-                <a:effectLst/>
-                <a:uFillTx/>
-                <a:latin typeface="Aptos"/>
-                <a:ea typeface="Aptos"/>
-              </a:rPr>
-              <a:t>without corresponding delivery value.</a:t>
+              <a:t>Idle bench time directly increases organizational cost without corresponding delivery value.</a:t>
             </a:r>
             <a:endParaRPr lang="en-US" sz="1300" b="0" u="none" strike="noStrike">
               <a:solidFill>
@@ -3992,7 +3738,7 @@
         <p:spPr>
           <a:xfrm>
             <a:off x="6172200" y="3200400"/>
-            <a:ext cx="5257440" cy="1599840"/>
+            <a:ext cx="5257080" cy="1599480"/>
           </a:xfrm>
           <a:prstGeom prst="roundRect">
             <a:avLst>
@@ -4047,7 +3793,7 @@
         <p:spPr>
           <a:xfrm>
             <a:off x="6428160" y="3456360"/>
-            <a:ext cx="502560" cy="502560"/>
+            <a:ext cx="502200" cy="502200"/>
           </a:xfrm>
           <a:prstGeom prst="ellipse">
             <a:avLst/>
@@ -4094,7 +3840,7 @@
         <p:spPr>
           <a:xfrm>
             <a:off x="6483600" y="3511800"/>
-            <a:ext cx="392040" cy="392040"/>
+            <a:ext cx="391680" cy="391680"/>
           </a:xfrm>
           <a:prstGeom prst="rect">
             <a:avLst/>
@@ -4114,7 +3860,7 @@
         <p:spPr>
           <a:xfrm>
             <a:off x="7086600" y="3401640"/>
-            <a:ext cx="4114440" cy="548280"/>
+            <a:ext cx="4114080" cy="547920"/>
           </a:xfrm>
           <a:prstGeom prst="rect">
             <a:avLst/>
@@ -4175,7 +3921,7 @@
         <p:spPr>
           <a:xfrm>
             <a:off x="6446520" y="4069080"/>
-            <a:ext cx="4708800" cy="639720"/>
+            <a:ext cx="4708440" cy="639360"/>
           </a:xfrm>
           <a:prstGeom prst="rect">
             <a:avLst/>
@@ -4236,7 +3982,7 @@
         <p:spPr>
           <a:xfrm>
             <a:off x="594360" y="5029200"/>
-            <a:ext cx="10972440" cy="685440"/>
+            <a:ext cx="10972080" cy="685080"/>
           </a:xfrm>
           <a:prstGeom prst="roundRect">
             <a:avLst>
@@ -4281,7 +4027,7 @@
         <p:spPr>
           <a:xfrm>
             <a:off x="914400" y="5029200"/>
-            <a:ext cx="10332360" cy="685440"/>
+            <a:ext cx="10332000" cy="685080"/>
           </a:xfrm>
           <a:prstGeom prst="rect">
             <a:avLst/>
@@ -4320,1627 +4066,7 @@
                 <a:latin typeface="Aptos"/>
                 <a:ea typeface="Aptos"/>
               </a:rPr>
-              <a:t>W</a:t>
-            </a:r>
-            <a:r>
-              <a:rPr lang="en-US" sz="1300" b="0" i="1" u="none" strike="noStrike">
-                <a:solidFill>
-                  <a:srgbClr val="FFFFFF"/>
-                </a:solidFill>
-                <a:effectLst/>
-                <a:uFillTx/>
-                <a:latin typeface="Aptos"/>
-                <a:ea typeface="Aptos"/>
-              </a:rPr>
-              <a:t>h</a:t>
-            </a:r>
-            <a:r>
-              <a:rPr lang="en-US" sz="1300" b="0" i="1" u="none" strike="noStrike">
-                <a:solidFill>
-                  <a:srgbClr val="FFFFFF"/>
-                </a:solidFill>
-                <a:effectLst/>
-                <a:uFillTx/>
-                <a:latin typeface="Aptos"/>
-                <a:ea typeface="Aptos"/>
-              </a:rPr>
-              <a:t>y</a:t>
-            </a:r>
-            <a:r>
-              <a:rPr lang="en-US" sz="1300" b="0" i="1" u="none" strike="noStrike">
-                <a:solidFill>
-                  <a:srgbClr val="FFFFFF"/>
-                </a:solidFill>
-                <a:effectLst/>
-                <a:uFillTx/>
-                <a:latin typeface="Aptos"/>
-                <a:ea typeface="Aptos"/>
-              </a:rPr>
-              <a:t> </a:t>
-            </a:r>
-            <a:r>
-              <a:rPr lang="en-US" sz="1300" b="0" i="1" u="none" strike="noStrike">
-                <a:solidFill>
-                  <a:srgbClr val="FFFFFF"/>
-                </a:solidFill>
-                <a:effectLst/>
-                <a:uFillTx/>
-                <a:latin typeface="Aptos"/>
-                <a:ea typeface="Aptos"/>
-              </a:rPr>
-              <a:t>t</a:t>
-            </a:r>
-            <a:r>
-              <a:rPr lang="en-US" sz="1300" b="0" i="1" u="none" strike="noStrike">
-                <a:solidFill>
-                  <a:srgbClr val="FFFFFF"/>
-                </a:solidFill>
-                <a:effectLst/>
-                <a:uFillTx/>
-                <a:latin typeface="Aptos"/>
-                <a:ea typeface="Aptos"/>
-              </a:rPr>
-              <a:t>h</a:t>
-            </a:r>
-            <a:r>
-              <a:rPr lang="en-US" sz="1300" b="0" i="1" u="none" strike="noStrike">
-                <a:solidFill>
-                  <a:srgbClr val="FFFFFF"/>
-                </a:solidFill>
-                <a:effectLst/>
-                <a:uFillTx/>
-                <a:latin typeface="Aptos"/>
-                <a:ea typeface="Aptos"/>
-              </a:rPr>
-              <a:t>i</a:t>
-            </a:r>
-            <a:r>
-              <a:rPr lang="en-US" sz="1300" b="0" i="1" u="none" strike="noStrike">
-                <a:solidFill>
-                  <a:srgbClr val="FFFFFF"/>
-                </a:solidFill>
-                <a:effectLst/>
-                <a:uFillTx/>
-                <a:latin typeface="Aptos"/>
-                <a:ea typeface="Aptos"/>
-              </a:rPr>
-              <a:t>s</a:t>
-            </a:r>
-            <a:r>
-              <a:rPr lang="en-US" sz="1300" b="0" i="1" u="none" strike="noStrike">
-                <a:solidFill>
-                  <a:srgbClr val="FFFFFF"/>
-                </a:solidFill>
-                <a:effectLst/>
-                <a:uFillTx/>
-                <a:latin typeface="Aptos"/>
-                <a:ea typeface="Aptos"/>
-              </a:rPr>
-              <a:t> </a:t>
-            </a:r>
-            <a:r>
-              <a:rPr lang="en-US" sz="1300" b="0" i="1" u="none" strike="noStrike">
-                <a:solidFill>
-                  <a:srgbClr val="FFFFFF"/>
-                </a:solidFill>
-                <a:effectLst/>
-                <a:uFillTx/>
-                <a:latin typeface="Aptos"/>
-                <a:ea typeface="Aptos"/>
-              </a:rPr>
-              <a:t>m</a:t>
-            </a:r>
-            <a:r>
-              <a:rPr lang="en-US" sz="1300" b="0" i="1" u="none" strike="noStrike">
-                <a:solidFill>
-                  <a:srgbClr val="FFFFFF"/>
-                </a:solidFill>
-                <a:effectLst/>
-                <a:uFillTx/>
-                <a:latin typeface="Aptos"/>
-                <a:ea typeface="Aptos"/>
-              </a:rPr>
-              <a:t>a</a:t>
-            </a:r>
-            <a:r>
-              <a:rPr lang="en-US" sz="1300" b="0" i="1" u="none" strike="noStrike">
-                <a:solidFill>
-                  <a:srgbClr val="FFFFFF"/>
-                </a:solidFill>
-                <a:effectLst/>
-                <a:uFillTx/>
-                <a:latin typeface="Aptos"/>
-                <a:ea typeface="Aptos"/>
-              </a:rPr>
-              <a:t>t</a:t>
-            </a:r>
-            <a:r>
-              <a:rPr lang="en-US" sz="1300" b="0" i="1" u="none" strike="noStrike">
-                <a:solidFill>
-                  <a:srgbClr val="FFFFFF"/>
-                </a:solidFill>
-                <a:effectLst/>
-                <a:uFillTx/>
-                <a:latin typeface="Aptos"/>
-                <a:ea typeface="Aptos"/>
-              </a:rPr>
-              <a:t>t</a:t>
-            </a:r>
-            <a:r>
-              <a:rPr lang="en-US" sz="1300" b="0" i="1" u="none" strike="noStrike">
-                <a:solidFill>
-                  <a:srgbClr val="FFFFFF"/>
-                </a:solidFill>
-                <a:effectLst/>
-                <a:uFillTx/>
-                <a:latin typeface="Aptos"/>
-                <a:ea typeface="Aptos"/>
-              </a:rPr>
-              <a:t>e</a:t>
-            </a:r>
-            <a:r>
-              <a:rPr lang="en-US" sz="1300" b="0" i="1" u="none" strike="noStrike">
-                <a:solidFill>
-                  <a:srgbClr val="FFFFFF"/>
-                </a:solidFill>
-                <a:effectLst/>
-                <a:uFillTx/>
-                <a:latin typeface="Aptos"/>
-                <a:ea typeface="Aptos"/>
-              </a:rPr>
-              <a:t>r</a:t>
-            </a:r>
-            <a:r>
-              <a:rPr lang="en-US" sz="1300" b="0" i="1" u="none" strike="noStrike">
-                <a:solidFill>
-                  <a:srgbClr val="FFFFFF"/>
-                </a:solidFill>
-                <a:effectLst/>
-                <a:uFillTx/>
-                <a:latin typeface="Aptos"/>
-                <a:ea typeface="Aptos"/>
-              </a:rPr>
-              <a:t>s</a:t>
-            </a:r>
-            <a:r>
-              <a:rPr lang="en-US" sz="1300" b="0" i="1" u="none" strike="noStrike">
-                <a:solidFill>
-                  <a:srgbClr val="FFFFFF"/>
-                </a:solidFill>
-                <a:effectLst/>
-                <a:uFillTx/>
-                <a:latin typeface="Aptos"/>
-                <a:ea typeface="Aptos"/>
-              </a:rPr>
-              <a:t>:</a:t>
-            </a:r>
-            <a:r>
-              <a:rPr lang="en-US" sz="1300" b="0" i="1" u="none" strike="noStrike">
-                <a:solidFill>
-                  <a:srgbClr val="FFFFFF"/>
-                </a:solidFill>
-                <a:effectLst/>
-                <a:uFillTx/>
-                <a:latin typeface="Aptos"/>
-                <a:ea typeface="Aptos"/>
-              </a:rPr>
-              <a:t> </a:t>
-            </a:r>
-            <a:r>
-              <a:rPr lang="en-US" sz="1300" b="0" i="1" u="none" strike="noStrike">
-                <a:solidFill>
-                  <a:srgbClr val="FFFFFF"/>
-                </a:solidFill>
-                <a:effectLst/>
-                <a:uFillTx/>
-                <a:latin typeface="Aptos"/>
-                <a:ea typeface="Aptos"/>
-              </a:rPr>
-              <a:t>w</a:t>
-            </a:r>
-            <a:r>
-              <a:rPr lang="en-US" sz="1300" b="0" i="1" u="none" strike="noStrike">
-                <a:solidFill>
-                  <a:srgbClr val="FFFFFF"/>
-                </a:solidFill>
-                <a:effectLst/>
-                <a:uFillTx/>
-                <a:latin typeface="Aptos"/>
-                <a:ea typeface="Aptos"/>
-              </a:rPr>
-              <a:t>o</a:t>
-            </a:r>
-            <a:r>
-              <a:rPr lang="en-US" sz="1300" b="0" i="1" u="none" strike="noStrike">
-                <a:solidFill>
-                  <a:srgbClr val="FFFFFF"/>
-                </a:solidFill>
-                <a:effectLst/>
-                <a:uFillTx/>
-                <a:latin typeface="Aptos"/>
-                <a:ea typeface="Aptos"/>
-              </a:rPr>
-              <a:t>r</a:t>
-            </a:r>
-            <a:r>
-              <a:rPr lang="en-US" sz="1300" b="0" i="1" u="none" strike="noStrike">
-                <a:solidFill>
-                  <a:srgbClr val="FFFFFF"/>
-                </a:solidFill>
-                <a:effectLst/>
-                <a:uFillTx/>
-                <a:latin typeface="Aptos"/>
-                <a:ea typeface="Aptos"/>
-              </a:rPr>
-              <a:t>k</a:t>
-            </a:r>
-            <a:r>
-              <a:rPr lang="en-US" sz="1300" b="0" i="1" u="none" strike="noStrike">
-                <a:solidFill>
-                  <a:srgbClr val="FFFFFF"/>
-                </a:solidFill>
-                <a:effectLst/>
-                <a:uFillTx/>
-                <a:latin typeface="Aptos"/>
-                <a:ea typeface="Aptos"/>
-              </a:rPr>
-              <a:t>f</a:t>
-            </a:r>
-            <a:r>
-              <a:rPr lang="en-US" sz="1300" b="0" i="1" u="none" strike="noStrike">
-                <a:solidFill>
-                  <a:srgbClr val="FFFFFF"/>
-                </a:solidFill>
-                <a:effectLst/>
-                <a:uFillTx/>
-                <a:latin typeface="Aptos"/>
-                <a:ea typeface="Aptos"/>
-              </a:rPr>
-              <a:t>o</a:t>
-            </a:r>
-            <a:r>
-              <a:rPr lang="en-US" sz="1300" b="0" i="1" u="none" strike="noStrike">
-                <a:solidFill>
-                  <a:srgbClr val="FFFFFF"/>
-                </a:solidFill>
-                <a:effectLst/>
-                <a:uFillTx/>
-                <a:latin typeface="Aptos"/>
-                <a:ea typeface="Aptos"/>
-              </a:rPr>
-              <a:t>r</a:t>
-            </a:r>
-            <a:r>
-              <a:rPr lang="en-US" sz="1300" b="0" i="1" u="none" strike="noStrike">
-                <a:solidFill>
-                  <a:srgbClr val="FFFFFF"/>
-                </a:solidFill>
-                <a:effectLst/>
-                <a:uFillTx/>
-                <a:latin typeface="Aptos"/>
-                <a:ea typeface="Aptos"/>
-              </a:rPr>
-              <a:t>c</a:t>
-            </a:r>
-            <a:r>
-              <a:rPr lang="en-US" sz="1300" b="0" i="1" u="none" strike="noStrike">
-                <a:solidFill>
-                  <a:srgbClr val="FFFFFF"/>
-                </a:solidFill>
-                <a:effectLst/>
-                <a:uFillTx/>
-                <a:latin typeface="Aptos"/>
-                <a:ea typeface="Aptos"/>
-              </a:rPr>
-              <a:t>e</a:t>
-            </a:r>
-            <a:r>
-              <a:rPr lang="en-US" sz="1300" b="0" i="1" u="none" strike="noStrike">
-                <a:solidFill>
-                  <a:srgbClr val="FFFFFF"/>
-                </a:solidFill>
-                <a:effectLst/>
-                <a:uFillTx/>
-                <a:latin typeface="Aptos"/>
-                <a:ea typeface="Aptos"/>
-              </a:rPr>
-              <a:t> </a:t>
-            </a:r>
-            <a:r>
-              <a:rPr lang="en-US" sz="1300" b="0" i="1" u="none" strike="noStrike">
-                <a:solidFill>
-                  <a:srgbClr val="FFFFFF"/>
-                </a:solidFill>
-                <a:effectLst/>
-                <a:uFillTx/>
-                <a:latin typeface="Aptos"/>
-                <a:ea typeface="Aptos"/>
-              </a:rPr>
-              <a:t>u</a:t>
-            </a:r>
-            <a:r>
-              <a:rPr lang="en-US" sz="1300" b="0" i="1" u="none" strike="noStrike">
-                <a:solidFill>
-                  <a:srgbClr val="FFFFFF"/>
-                </a:solidFill>
-                <a:effectLst/>
-                <a:uFillTx/>
-                <a:latin typeface="Aptos"/>
-                <a:ea typeface="Aptos"/>
-              </a:rPr>
-              <a:t>t</a:t>
-            </a:r>
-            <a:r>
-              <a:rPr lang="en-US" sz="1300" b="0" i="1" u="none" strike="noStrike">
-                <a:solidFill>
-                  <a:srgbClr val="FFFFFF"/>
-                </a:solidFill>
-                <a:effectLst/>
-                <a:uFillTx/>
-                <a:latin typeface="Aptos"/>
-                <a:ea typeface="Aptos"/>
-              </a:rPr>
-              <a:t>i</a:t>
-            </a:r>
-            <a:r>
-              <a:rPr lang="en-US" sz="1300" b="0" i="1" u="none" strike="noStrike">
-                <a:solidFill>
-                  <a:srgbClr val="FFFFFF"/>
-                </a:solidFill>
-                <a:effectLst/>
-                <a:uFillTx/>
-                <a:latin typeface="Aptos"/>
-                <a:ea typeface="Aptos"/>
-              </a:rPr>
-              <a:t>l</a:t>
-            </a:r>
-            <a:r>
-              <a:rPr lang="en-US" sz="1300" b="0" i="1" u="none" strike="noStrike">
-                <a:solidFill>
-                  <a:srgbClr val="FFFFFF"/>
-                </a:solidFill>
-                <a:effectLst/>
-                <a:uFillTx/>
-                <a:latin typeface="Aptos"/>
-                <a:ea typeface="Aptos"/>
-              </a:rPr>
-              <a:t>i</a:t>
-            </a:r>
-            <a:r>
-              <a:rPr lang="en-US" sz="1300" b="0" i="1" u="none" strike="noStrike">
-                <a:solidFill>
-                  <a:srgbClr val="FFFFFF"/>
-                </a:solidFill>
-                <a:effectLst/>
-                <a:uFillTx/>
-                <a:latin typeface="Aptos"/>
-                <a:ea typeface="Aptos"/>
-              </a:rPr>
-              <a:t>z</a:t>
-            </a:r>
-            <a:r>
-              <a:rPr lang="en-US" sz="1300" b="0" i="1" u="none" strike="noStrike">
-                <a:solidFill>
-                  <a:srgbClr val="FFFFFF"/>
-                </a:solidFill>
-                <a:effectLst/>
-                <a:uFillTx/>
-                <a:latin typeface="Aptos"/>
-                <a:ea typeface="Aptos"/>
-              </a:rPr>
-              <a:t>a</a:t>
-            </a:r>
-            <a:r>
-              <a:rPr lang="en-US" sz="1300" b="0" i="1" u="none" strike="noStrike">
-                <a:solidFill>
-                  <a:srgbClr val="FFFFFF"/>
-                </a:solidFill>
-                <a:effectLst/>
-                <a:uFillTx/>
-                <a:latin typeface="Aptos"/>
-                <a:ea typeface="Aptos"/>
-              </a:rPr>
-              <a:t>t</a:t>
-            </a:r>
-            <a:r>
-              <a:rPr lang="en-US" sz="1300" b="0" i="1" u="none" strike="noStrike">
-                <a:solidFill>
-                  <a:srgbClr val="FFFFFF"/>
-                </a:solidFill>
-                <a:effectLst/>
-                <a:uFillTx/>
-                <a:latin typeface="Aptos"/>
-                <a:ea typeface="Aptos"/>
-              </a:rPr>
-              <a:t>i</a:t>
-            </a:r>
-            <a:r>
-              <a:rPr lang="en-US" sz="1300" b="0" i="1" u="none" strike="noStrike">
-                <a:solidFill>
-                  <a:srgbClr val="FFFFFF"/>
-                </a:solidFill>
-                <a:effectLst/>
-                <a:uFillTx/>
-                <a:latin typeface="Aptos"/>
-                <a:ea typeface="Aptos"/>
-              </a:rPr>
-              <a:t>o</a:t>
-            </a:r>
-            <a:r>
-              <a:rPr lang="en-US" sz="1300" b="0" i="1" u="none" strike="noStrike">
-                <a:solidFill>
-                  <a:srgbClr val="FFFFFF"/>
-                </a:solidFill>
-                <a:effectLst/>
-                <a:uFillTx/>
-                <a:latin typeface="Aptos"/>
-                <a:ea typeface="Aptos"/>
-              </a:rPr>
-              <a:t>n</a:t>
-            </a:r>
-            <a:r>
-              <a:rPr lang="en-US" sz="1300" b="0" i="1" u="none" strike="noStrike">
-                <a:solidFill>
-                  <a:srgbClr val="FFFFFF"/>
-                </a:solidFill>
-                <a:effectLst/>
-                <a:uFillTx/>
-                <a:latin typeface="Aptos"/>
-                <a:ea typeface="Aptos"/>
-              </a:rPr>
-              <a:t>,</a:t>
-            </a:r>
-            <a:r>
-              <a:rPr lang="en-US" sz="1300" b="0" i="1" u="none" strike="noStrike">
-                <a:solidFill>
-                  <a:srgbClr val="FFFFFF"/>
-                </a:solidFill>
-                <a:effectLst/>
-                <a:uFillTx/>
-                <a:latin typeface="Aptos"/>
-                <a:ea typeface="Aptos"/>
-              </a:rPr>
-              <a:t> </a:t>
-            </a:r>
-            <a:r>
-              <a:rPr lang="en-US" sz="1300" b="0" i="1" u="none" strike="noStrike">
-                <a:solidFill>
-                  <a:srgbClr val="FFFFFF"/>
-                </a:solidFill>
-                <a:effectLst/>
-                <a:uFillTx/>
-                <a:latin typeface="Aptos"/>
-                <a:ea typeface="Aptos"/>
-              </a:rPr>
-              <a:t>d</a:t>
-            </a:r>
-            <a:r>
-              <a:rPr lang="en-US" sz="1300" b="0" i="1" u="none" strike="noStrike">
-                <a:solidFill>
-                  <a:srgbClr val="FFFFFF"/>
-                </a:solidFill>
-                <a:effectLst/>
-                <a:uFillTx/>
-                <a:latin typeface="Aptos"/>
-                <a:ea typeface="Aptos"/>
-              </a:rPr>
-              <a:t>e</a:t>
-            </a:r>
-            <a:r>
-              <a:rPr lang="en-US" sz="1300" b="0" i="1" u="none" strike="noStrike">
-                <a:solidFill>
-                  <a:srgbClr val="FFFFFF"/>
-                </a:solidFill>
-                <a:effectLst/>
-                <a:uFillTx/>
-                <a:latin typeface="Aptos"/>
-                <a:ea typeface="Aptos"/>
-              </a:rPr>
-              <a:t>l</a:t>
-            </a:r>
-            <a:r>
-              <a:rPr lang="en-US" sz="1300" b="0" i="1" u="none" strike="noStrike">
-                <a:solidFill>
-                  <a:srgbClr val="FFFFFF"/>
-                </a:solidFill>
-                <a:effectLst/>
-                <a:uFillTx/>
-                <a:latin typeface="Aptos"/>
-                <a:ea typeface="Aptos"/>
-              </a:rPr>
-              <a:t>i</a:t>
-            </a:r>
-            <a:r>
-              <a:rPr lang="en-US" sz="1300" b="0" i="1" u="none" strike="noStrike">
-                <a:solidFill>
-                  <a:srgbClr val="FFFFFF"/>
-                </a:solidFill>
-                <a:effectLst/>
-                <a:uFillTx/>
-                <a:latin typeface="Aptos"/>
-                <a:ea typeface="Aptos"/>
-              </a:rPr>
-              <a:t>v</a:t>
-            </a:r>
-            <a:r>
-              <a:rPr lang="en-US" sz="1300" b="0" i="1" u="none" strike="noStrike">
-                <a:solidFill>
-                  <a:srgbClr val="FFFFFF"/>
-                </a:solidFill>
-                <a:effectLst/>
-                <a:uFillTx/>
-                <a:latin typeface="Aptos"/>
-                <a:ea typeface="Aptos"/>
-              </a:rPr>
-              <a:t>e</a:t>
-            </a:r>
-            <a:r>
-              <a:rPr lang="en-US" sz="1300" b="0" i="1" u="none" strike="noStrike">
-                <a:solidFill>
-                  <a:srgbClr val="FFFFFF"/>
-                </a:solidFill>
-                <a:effectLst/>
-                <a:uFillTx/>
-                <a:latin typeface="Aptos"/>
-                <a:ea typeface="Aptos"/>
-              </a:rPr>
-              <a:t>r</a:t>
-            </a:r>
-            <a:r>
-              <a:rPr lang="en-US" sz="1300" b="0" i="1" u="none" strike="noStrike">
-                <a:solidFill>
-                  <a:srgbClr val="FFFFFF"/>
-                </a:solidFill>
-                <a:effectLst/>
-                <a:uFillTx/>
-                <a:latin typeface="Aptos"/>
-                <a:ea typeface="Aptos"/>
-              </a:rPr>
-              <a:t>y</a:t>
-            </a:r>
-            <a:r>
-              <a:rPr lang="en-US" sz="1300" b="0" i="1" u="none" strike="noStrike">
-                <a:solidFill>
-                  <a:srgbClr val="FFFFFF"/>
-                </a:solidFill>
-                <a:effectLst/>
-                <a:uFillTx/>
-                <a:latin typeface="Aptos"/>
-                <a:ea typeface="Aptos"/>
-              </a:rPr>
-              <a:t> </a:t>
-            </a:r>
-            <a:r>
-              <a:rPr lang="en-US" sz="1300" b="0" i="1" u="none" strike="noStrike">
-                <a:solidFill>
-                  <a:srgbClr val="FFFFFF"/>
-                </a:solidFill>
-                <a:effectLst/>
-                <a:uFillTx/>
-                <a:latin typeface="Aptos"/>
-                <a:ea typeface="Aptos"/>
-              </a:rPr>
-              <a:t>r</a:t>
-            </a:r>
-            <a:r>
-              <a:rPr lang="en-US" sz="1300" b="0" i="1" u="none" strike="noStrike">
-                <a:solidFill>
-                  <a:srgbClr val="FFFFFF"/>
-                </a:solidFill>
-                <a:effectLst/>
-                <a:uFillTx/>
-                <a:latin typeface="Aptos"/>
-                <a:ea typeface="Aptos"/>
-              </a:rPr>
-              <a:t>e</a:t>
-            </a:r>
-            <a:r>
-              <a:rPr lang="en-US" sz="1300" b="0" i="1" u="none" strike="noStrike">
-                <a:solidFill>
-                  <a:srgbClr val="FFFFFF"/>
-                </a:solidFill>
-                <a:effectLst/>
-                <a:uFillTx/>
-                <a:latin typeface="Aptos"/>
-                <a:ea typeface="Aptos"/>
-              </a:rPr>
-              <a:t>a</a:t>
-            </a:r>
-            <a:r>
-              <a:rPr lang="en-US" sz="1300" b="0" i="1" u="none" strike="noStrike">
-                <a:solidFill>
-                  <a:srgbClr val="FFFFFF"/>
-                </a:solidFill>
-                <a:effectLst/>
-                <a:uFillTx/>
-                <a:latin typeface="Aptos"/>
-                <a:ea typeface="Aptos"/>
-              </a:rPr>
-              <a:t>d</a:t>
-            </a:r>
-            <a:r>
-              <a:rPr lang="en-US" sz="1300" b="0" i="1" u="none" strike="noStrike">
-                <a:solidFill>
-                  <a:srgbClr val="FFFFFF"/>
-                </a:solidFill>
-                <a:effectLst/>
-                <a:uFillTx/>
-                <a:latin typeface="Aptos"/>
-                <a:ea typeface="Aptos"/>
-              </a:rPr>
-              <a:t>i</a:t>
-            </a:r>
-            <a:r>
-              <a:rPr lang="en-US" sz="1300" b="0" i="1" u="none" strike="noStrike">
-                <a:solidFill>
-                  <a:srgbClr val="FFFFFF"/>
-                </a:solidFill>
-                <a:effectLst/>
-                <a:uFillTx/>
-                <a:latin typeface="Aptos"/>
-                <a:ea typeface="Aptos"/>
-              </a:rPr>
-              <a:t>n</a:t>
-            </a:r>
-            <a:r>
-              <a:rPr lang="en-US" sz="1300" b="0" i="1" u="none" strike="noStrike">
-                <a:solidFill>
-                  <a:srgbClr val="FFFFFF"/>
-                </a:solidFill>
-                <a:effectLst/>
-                <a:uFillTx/>
-                <a:latin typeface="Aptos"/>
-                <a:ea typeface="Aptos"/>
-              </a:rPr>
-              <a:t>e</a:t>
-            </a:r>
-            <a:r>
-              <a:rPr lang="en-US" sz="1300" b="0" i="1" u="none" strike="noStrike">
-                <a:solidFill>
-                  <a:srgbClr val="FFFFFF"/>
-                </a:solidFill>
-                <a:effectLst/>
-                <a:uFillTx/>
-                <a:latin typeface="Aptos"/>
-                <a:ea typeface="Aptos"/>
-              </a:rPr>
-              <a:t>s</a:t>
-            </a:r>
-            <a:r>
-              <a:rPr lang="en-US" sz="1300" b="0" i="1" u="none" strike="noStrike">
-                <a:solidFill>
-                  <a:srgbClr val="FFFFFF"/>
-                </a:solidFill>
-                <a:effectLst/>
-                <a:uFillTx/>
-                <a:latin typeface="Aptos"/>
-                <a:ea typeface="Aptos"/>
-              </a:rPr>
-              <a:t>s</a:t>
-            </a:r>
-            <a:r>
-              <a:rPr lang="en-US" sz="1300" b="0" i="1" u="none" strike="noStrike">
-                <a:solidFill>
-                  <a:srgbClr val="FFFFFF"/>
-                </a:solidFill>
-                <a:effectLst/>
-                <a:uFillTx/>
-                <a:latin typeface="Aptos"/>
-                <a:ea typeface="Aptos"/>
-              </a:rPr>
-              <a:t>,</a:t>
-            </a:r>
-            <a:r>
-              <a:rPr lang="en-US" sz="1300" b="0" i="1" u="none" strike="noStrike">
-                <a:solidFill>
-                  <a:srgbClr val="FFFFFF"/>
-                </a:solidFill>
-                <a:effectLst/>
-                <a:uFillTx/>
-                <a:latin typeface="Aptos"/>
-                <a:ea typeface="Aptos"/>
-              </a:rPr>
-              <a:t> </a:t>
-            </a:r>
-            <a:r>
-              <a:rPr lang="en-US" sz="1300" b="0" i="1" u="none" strike="noStrike">
-                <a:solidFill>
-                  <a:srgbClr val="FFFFFF"/>
-                </a:solidFill>
-                <a:effectLst/>
-                <a:uFillTx/>
-                <a:latin typeface="Aptos"/>
-                <a:ea typeface="Aptos"/>
-              </a:rPr>
-              <a:t>a</a:t>
-            </a:r>
-            <a:r>
-              <a:rPr lang="en-US" sz="1300" b="0" i="1" u="none" strike="noStrike">
-                <a:solidFill>
-                  <a:srgbClr val="FFFFFF"/>
-                </a:solidFill>
-                <a:effectLst/>
-                <a:uFillTx/>
-                <a:latin typeface="Aptos"/>
-                <a:ea typeface="Aptos"/>
-              </a:rPr>
-              <a:t>n</a:t>
-            </a:r>
-            <a:r>
-              <a:rPr lang="en-US" sz="1300" b="0" i="1" u="none" strike="noStrike">
-                <a:solidFill>
-                  <a:srgbClr val="FFFFFF"/>
-                </a:solidFill>
-                <a:effectLst/>
-                <a:uFillTx/>
-                <a:latin typeface="Aptos"/>
-                <a:ea typeface="Aptos"/>
-              </a:rPr>
-              <a:t>d</a:t>
-            </a:r>
-            <a:r>
-              <a:rPr lang="en-US" sz="1300" b="0" i="1" u="none" strike="noStrike">
-                <a:solidFill>
-                  <a:srgbClr val="FFFFFF"/>
-                </a:solidFill>
-                <a:effectLst/>
-                <a:uFillTx/>
-                <a:latin typeface="Aptos"/>
-                <a:ea typeface="Aptos"/>
-              </a:rPr>
-              <a:t> </a:t>
-            </a:r>
-            <a:r>
-              <a:rPr lang="en-US" sz="1300" b="0" i="1" u="none" strike="noStrike">
-                <a:solidFill>
-                  <a:srgbClr val="FFFFFF"/>
-                </a:solidFill>
-                <a:effectLst/>
-                <a:uFillTx/>
-                <a:latin typeface="Aptos"/>
-                <a:ea typeface="Aptos"/>
-              </a:rPr>
-              <a:t>e</a:t>
-            </a:r>
-            <a:r>
-              <a:rPr lang="en-US" sz="1300" b="0" i="1" u="none" strike="noStrike">
-                <a:solidFill>
-                  <a:srgbClr val="FFFFFF"/>
-                </a:solidFill>
-                <a:effectLst/>
-                <a:uFillTx/>
-                <a:latin typeface="Aptos"/>
-                <a:ea typeface="Aptos"/>
-              </a:rPr>
-              <a:t>m</a:t>
-            </a:r>
-            <a:r>
-              <a:rPr lang="en-US" sz="1300" b="0" i="1" u="none" strike="noStrike">
-                <a:solidFill>
-                  <a:srgbClr val="FFFFFF"/>
-                </a:solidFill>
-                <a:effectLst/>
-                <a:uFillTx/>
-                <a:latin typeface="Aptos"/>
-                <a:ea typeface="Aptos"/>
-              </a:rPr>
-              <a:t>p</a:t>
-            </a:r>
-            <a:r>
-              <a:rPr lang="en-US" sz="1300" b="0" i="1" u="none" strike="noStrike">
-                <a:solidFill>
-                  <a:srgbClr val="FFFFFF"/>
-                </a:solidFill>
-                <a:effectLst/>
-                <a:uFillTx/>
-                <a:latin typeface="Aptos"/>
-                <a:ea typeface="Aptos"/>
-              </a:rPr>
-              <a:t>l</a:t>
-            </a:r>
-            <a:r>
-              <a:rPr lang="en-US" sz="1300" b="0" i="1" u="none" strike="noStrike">
-                <a:solidFill>
-                  <a:srgbClr val="FFFFFF"/>
-                </a:solidFill>
-                <a:effectLst/>
-                <a:uFillTx/>
-                <a:latin typeface="Aptos"/>
-                <a:ea typeface="Aptos"/>
-              </a:rPr>
-              <a:t>o</a:t>
-            </a:r>
-            <a:r>
-              <a:rPr lang="en-US" sz="1300" b="0" i="1" u="none" strike="noStrike">
-                <a:solidFill>
-                  <a:srgbClr val="FFFFFF"/>
-                </a:solidFill>
-                <a:effectLst/>
-                <a:uFillTx/>
-                <a:latin typeface="Aptos"/>
-                <a:ea typeface="Aptos"/>
-              </a:rPr>
-              <a:t>y</a:t>
-            </a:r>
-            <a:r>
-              <a:rPr lang="en-US" sz="1300" b="0" i="1" u="none" strike="noStrike">
-                <a:solidFill>
-                  <a:srgbClr val="FFFFFF"/>
-                </a:solidFill>
-                <a:effectLst/>
-                <a:uFillTx/>
-                <a:latin typeface="Aptos"/>
-                <a:ea typeface="Aptos"/>
-              </a:rPr>
-              <a:t>e</a:t>
-            </a:r>
-            <a:r>
-              <a:rPr lang="en-US" sz="1300" b="0" i="1" u="none" strike="noStrike">
-                <a:solidFill>
-                  <a:srgbClr val="FFFFFF"/>
-                </a:solidFill>
-                <a:effectLst/>
-                <a:uFillTx/>
-                <a:latin typeface="Aptos"/>
-                <a:ea typeface="Aptos"/>
-              </a:rPr>
-              <a:t>e</a:t>
-            </a:r>
-            <a:r>
-              <a:rPr lang="en-US" sz="1300" b="0" i="1" u="none" strike="noStrike">
-                <a:solidFill>
-                  <a:srgbClr val="FFFFFF"/>
-                </a:solidFill>
-                <a:effectLst/>
-                <a:uFillTx/>
-                <a:latin typeface="Aptos"/>
-                <a:ea typeface="Aptos"/>
-              </a:rPr>
-              <a:t> </a:t>
-            </a:r>
-            <a:r>
-              <a:rPr lang="en-US" sz="1300" b="0" i="1" u="none" strike="noStrike">
-                <a:solidFill>
-                  <a:srgbClr val="FFFFFF"/>
-                </a:solidFill>
-                <a:effectLst/>
-                <a:uFillTx/>
-                <a:latin typeface="Aptos"/>
-                <a:ea typeface="Aptos"/>
-              </a:rPr>
-              <a:t>e</a:t>
-            </a:r>
-            <a:r>
-              <a:rPr lang="en-US" sz="1300" b="0" i="1" u="none" strike="noStrike">
-                <a:solidFill>
-                  <a:srgbClr val="FFFFFF"/>
-                </a:solidFill>
-                <a:effectLst/>
-                <a:uFillTx/>
-                <a:latin typeface="Aptos"/>
-                <a:ea typeface="Aptos"/>
-              </a:rPr>
-              <a:t>n</a:t>
-            </a:r>
-            <a:r>
-              <a:rPr lang="en-US" sz="1300" b="0" i="1" u="none" strike="noStrike">
-                <a:solidFill>
-                  <a:srgbClr val="FFFFFF"/>
-                </a:solidFill>
-                <a:effectLst/>
-                <a:uFillTx/>
-                <a:latin typeface="Aptos"/>
-                <a:ea typeface="Aptos"/>
-              </a:rPr>
-              <a:t>g</a:t>
-            </a:r>
-            <a:r>
-              <a:rPr lang="en-US" sz="1300" b="0" i="1" u="none" strike="noStrike">
-                <a:solidFill>
-                  <a:srgbClr val="FFFFFF"/>
-                </a:solidFill>
-                <a:effectLst/>
-                <a:uFillTx/>
-                <a:latin typeface="Aptos"/>
-                <a:ea typeface="Aptos"/>
-              </a:rPr>
-              <a:t>a</a:t>
-            </a:r>
-            <a:r>
-              <a:rPr lang="en-US" sz="1300" b="0" i="1" u="none" strike="noStrike">
-                <a:solidFill>
-                  <a:srgbClr val="FFFFFF"/>
-                </a:solidFill>
-                <a:effectLst/>
-                <a:uFillTx/>
-                <a:latin typeface="Aptos"/>
-                <a:ea typeface="Aptos"/>
-              </a:rPr>
-              <a:t>g</a:t>
-            </a:r>
-            <a:r>
-              <a:rPr lang="en-US" sz="1300" b="0" i="1" u="none" strike="noStrike">
-                <a:solidFill>
-                  <a:srgbClr val="FFFFFF"/>
-                </a:solidFill>
-                <a:effectLst/>
-                <a:uFillTx/>
-                <a:latin typeface="Aptos"/>
-                <a:ea typeface="Aptos"/>
-              </a:rPr>
-              <a:t>e</a:t>
-            </a:r>
-            <a:r>
-              <a:rPr lang="en-US" sz="1300" b="0" i="1" u="none" strike="noStrike">
-                <a:solidFill>
-                  <a:srgbClr val="FFFFFF"/>
-                </a:solidFill>
-                <a:effectLst/>
-                <a:uFillTx/>
-                <a:latin typeface="Aptos"/>
-                <a:ea typeface="Aptos"/>
-              </a:rPr>
-              <a:t>m</a:t>
-            </a:r>
-            <a:r>
-              <a:rPr lang="en-US" sz="1300" b="0" i="1" u="none" strike="noStrike">
-                <a:solidFill>
-                  <a:srgbClr val="FFFFFF"/>
-                </a:solidFill>
-                <a:effectLst/>
-                <a:uFillTx/>
-                <a:latin typeface="Aptos"/>
-                <a:ea typeface="Aptos"/>
-              </a:rPr>
-              <a:t>e</a:t>
-            </a:r>
-            <a:r>
-              <a:rPr lang="en-US" sz="1300" b="0" i="1" u="none" strike="noStrike">
-                <a:solidFill>
-                  <a:srgbClr val="FFFFFF"/>
-                </a:solidFill>
-                <a:effectLst/>
-                <a:uFillTx/>
-                <a:latin typeface="Aptos"/>
-                <a:ea typeface="Aptos"/>
-              </a:rPr>
-              <a:t>n</a:t>
-            </a:r>
-            <a:r>
-              <a:rPr lang="en-US" sz="1300" b="0" i="1" u="none" strike="noStrike">
-                <a:solidFill>
-                  <a:srgbClr val="FFFFFF"/>
-                </a:solidFill>
-                <a:effectLst/>
-                <a:uFillTx/>
-                <a:latin typeface="Aptos"/>
-                <a:ea typeface="Aptos"/>
-              </a:rPr>
-              <a:t>t</a:t>
-            </a:r>
-            <a:r>
-              <a:rPr lang="en-US" sz="1300" b="0" i="1" u="none" strike="noStrike">
-                <a:solidFill>
-                  <a:srgbClr val="FFFFFF"/>
-                </a:solidFill>
-                <a:effectLst/>
-                <a:uFillTx/>
-                <a:latin typeface="Aptos"/>
-                <a:ea typeface="Aptos"/>
-              </a:rPr>
-              <a:t> </a:t>
-            </a:r>
-            <a:r>
-              <a:rPr lang="en-US" sz="1300" b="0" i="1" u="none" strike="noStrike">
-                <a:solidFill>
-                  <a:srgbClr val="FFFFFF"/>
-                </a:solidFill>
-                <a:effectLst/>
-                <a:uFillTx/>
-                <a:latin typeface="Aptos"/>
-                <a:ea typeface="Aptos"/>
-              </a:rPr>
-              <a:t>a</a:t>
-            </a:r>
-            <a:r>
-              <a:rPr lang="en-US" sz="1300" b="0" i="1" u="none" strike="noStrike">
-                <a:solidFill>
-                  <a:srgbClr val="FFFFFF"/>
-                </a:solidFill>
-                <a:effectLst/>
-                <a:uFillTx/>
-                <a:latin typeface="Aptos"/>
-                <a:ea typeface="Aptos"/>
-              </a:rPr>
-              <a:t>l</a:t>
-            </a:r>
-            <a:r>
-              <a:rPr lang="en-US" sz="1300" b="0" i="1" u="none" strike="noStrike">
-                <a:solidFill>
-                  <a:srgbClr val="FFFFFF"/>
-                </a:solidFill>
-                <a:effectLst/>
-                <a:uFillTx/>
-                <a:latin typeface="Aptos"/>
-                <a:ea typeface="Aptos"/>
-              </a:rPr>
-              <a:t>l</a:t>
-            </a:r>
-            <a:r>
-              <a:rPr lang="en-US" sz="1300" b="0" i="1" u="none" strike="noStrike">
-                <a:solidFill>
-                  <a:srgbClr val="FFFFFF"/>
-                </a:solidFill>
-                <a:effectLst/>
-                <a:uFillTx/>
-                <a:latin typeface="Aptos"/>
-                <a:ea typeface="Aptos"/>
-              </a:rPr>
-              <a:t> </a:t>
-            </a:r>
-            <a:r>
-              <a:rPr lang="en-US" sz="1300" b="0" i="1" u="none" strike="noStrike">
-                <a:solidFill>
-                  <a:srgbClr val="FFFFFF"/>
-                </a:solidFill>
-                <a:effectLst/>
-                <a:uFillTx/>
-                <a:latin typeface="Aptos"/>
-                <a:ea typeface="Aptos"/>
-              </a:rPr>
-              <a:t>d</a:t>
-            </a:r>
-            <a:r>
-              <a:rPr lang="en-US" sz="1300" b="0" i="1" u="none" strike="noStrike">
-                <a:solidFill>
-                  <a:srgbClr val="FFFFFF"/>
-                </a:solidFill>
-                <a:effectLst/>
-                <a:uFillTx/>
-                <a:latin typeface="Aptos"/>
-                <a:ea typeface="Aptos"/>
-              </a:rPr>
-              <a:t>e</a:t>
-            </a:r>
-            <a:r>
-              <a:rPr lang="en-US" sz="1300" b="0" i="1" u="none" strike="noStrike">
-                <a:solidFill>
-                  <a:srgbClr val="FFFFFF"/>
-                </a:solidFill>
-                <a:effectLst/>
-                <a:uFillTx/>
-                <a:latin typeface="Aptos"/>
-                <a:ea typeface="Aptos"/>
-              </a:rPr>
-              <a:t>p</a:t>
-            </a:r>
-            <a:r>
-              <a:rPr lang="en-US" sz="1300" b="0" i="1" u="none" strike="noStrike">
-                <a:solidFill>
-                  <a:srgbClr val="FFFFFF"/>
-                </a:solidFill>
-                <a:effectLst/>
-                <a:uFillTx/>
-                <a:latin typeface="Aptos"/>
-                <a:ea typeface="Aptos"/>
-              </a:rPr>
-              <a:t>e</a:t>
-            </a:r>
-            <a:r>
-              <a:rPr lang="en-US" sz="1300" b="0" i="1" u="none" strike="noStrike">
-                <a:solidFill>
-                  <a:srgbClr val="FFFFFF"/>
-                </a:solidFill>
-                <a:effectLst/>
-                <a:uFillTx/>
-                <a:latin typeface="Aptos"/>
-                <a:ea typeface="Aptos"/>
-              </a:rPr>
-              <a:t>n</a:t>
-            </a:r>
-            <a:r>
-              <a:rPr lang="en-US" sz="1300" b="0" i="1" u="none" strike="noStrike">
-                <a:solidFill>
-                  <a:srgbClr val="FFFFFF"/>
-                </a:solidFill>
-                <a:effectLst/>
-                <a:uFillTx/>
-                <a:latin typeface="Aptos"/>
-                <a:ea typeface="Aptos"/>
-              </a:rPr>
-              <a:t>d</a:t>
-            </a:r>
-            <a:r>
-              <a:rPr lang="en-US" sz="1300" b="0" i="1" u="none" strike="noStrike">
-                <a:solidFill>
-                  <a:srgbClr val="FFFFFF"/>
-                </a:solidFill>
-                <a:effectLst/>
-                <a:uFillTx/>
-                <a:latin typeface="Aptos"/>
-                <a:ea typeface="Aptos"/>
-              </a:rPr>
-              <a:t> </a:t>
-            </a:r>
-            <a:r>
-              <a:rPr lang="en-US" sz="1300" b="0" i="1" u="none" strike="noStrike">
-                <a:solidFill>
-                  <a:srgbClr val="FFFFFF"/>
-                </a:solidFill>
-                <a:effectLst/>
-                <a:uFillTx/>
-                <a:latin typeface="Aptos"/>
-                <a:ea typeface="Aptos"/>
-              </a:rPr>
-              <a:t>o</a:t>
-            </a:r>
-            <a:r>
-              <a:rPr lang="en-US" sz="1300" b="0" i="1" u="none" strike="noStrike">
-                <a:solidFill>
-                  <a:srgbClr val="FFFFFF"/>
-                </a:solidFill>
-                <a:effectLst/>
-                <a:uFillTx/>
-                <a:latin typeface="Aptos"/>
-                <a:ea typeface="Aptos"/>
-              </a:rPr>
-              <a:t>n</a:t>
-            </a:r>
-            <a:r>
-              <a:rPr lang="en-US" sz="1300" b="0" i="1" u="none" strike="noStrike">
-                <a:solidFill>
-                  <a:srgbClr val="FFFFFF"/>
-                </a:solidFill>
-                <a:effectLst/>
-                <a:uFillTx/>
-                <a:latin typeface="Aptos"/>
-                <a:ea typeface="Aptos"/>
-              </a:rPr>
-              <a:t> </a:t>
-            </a:r>
-            <a:r>
-              <a:rPr lang="en-US" sz="1300" b="0" i="1" u="none" strike="noStrike">
-                <a:solidFill>
-                  <a:srgbClr val="FFFFFF"/>
-                </a:solidFill>
-                <a:effectLst/>
-                <a:uFillTx/>
-                <a:latin typeface="Aptos"/>
-                <a:ea typeface="Aptos"/>
-              </a:rPr>
-              <a:t>h</a:t>
-            </a:r>
-            <a:r>
-              <a:rPr lang="en-US" sz="1300" b="0" i="1" u="none" strike="noStrike">
-                <a:solidFill>
-                  <a:srgbClr val="FFFFFF"/>
-                </a:solidFill>
-                <a:effectLst/>
-                <a:uFillTx/>
-                <a:latin typeface="Aptos"/>
-                <a:ea typeface="Aptos"/>
-              </a:rPr>
-              <a:t>o</a:t>
-            </a:r>
-            <a:r>
-              <a:rPr lang="en-US" sz="1300" b="0" i="1" u="none" strike="noStrike">
-                <a:solidFill>
-                  <a:srgbClr val="FFFFFF"/>
-                </a:solidFill>
-                <a:effectLst/>
-                <a:uFillTx/>
-                <a:latin typeface="Aptos"/>
-                <a:ea typeface="Aptos"/>
-              </a:rPr>
-              <a:t>w</a:t>
-            </a:r>
-            <a:r>
-              <a:rPr lang="en-US" sz="1300" b="0" i="1" u="none" strike="noStrike">
-                <a:solidFill>
-                  <a:srgbClr val="FFFFFF"/>
-                </a:solidFill>
-                <a:effectLst/>
-                <a:uFillTx/>
-                <a:latin typeface="Aptos"/>
-                <a:ea typeface="Aptos"/>
-              </a:rPr>
-              <a:t> </a:t>
-            </a:r>
-            <a:r>
-              <a:rPr lang="en-US" sz="1300" b="0" i="1" u="none" strike="noStrike">
-                <a:solidFill>
-                  <a:srgbClr val="FFFFFF"/>
-                </a:solidFill>
-                <a:effectLst/>
-                <a:uFillTx/>
-                <a:latin typeface="Aptos"/>
-                <a:ea typeface="Aptos"/>
-              </a:rPr>
-              <a:t>q</a:t>
-            </a:r>
-            <a:r>
-              <a:rPr lang="en-US" sz="1300" b="0" i="1" u="none" strike="noStrike">
-                <a:solidFill>
-                  <a:srgbClr val="FFFFFF"/>
-                </a:solidFill>
-                <a:effectLst/>
-                <a:uFillTx/>
-                <a:latin typeface="Aptos"/>
-                <a:ea typeface="Aptos"/>
-              </a:rPr>
-              <a:t>u</a:t>
-            </a:r>
-            <a:r>
-              <a:rPr lang="en-US" sz="1300" b="0" i="1" u="none" strike="noStrike">
-                <a:solidFill>
-                  <a:srgbClr val="FFFFFF"/>
-                </a:solidFill>
-                <a:effectLst/>
-                <a:uFillTx/>
-                <a:latin typeface="Aptos"/>
-                <a:ea typeface="Aptos"/>
-              </a:rPr>
-              <a:t>i</a:t>
-            </a:r>
-            <a:r>
-              <a:rPr lang="en-US" sz="1300" b="0" i="1" u="none" strike="noStrike">
-                <a:solidFill>
-                  <a:srgbClr val="FFFFFF"/>
-                </a:solidFill>
-                <a:effectLst/>
-                <a:uFillTx/>
-                <a:latin typeface="Aptos"/>
-                <a:ea typeface="Aptos"/>
-              </a:rPr>
-              <a:t>c</a:t>
-            </a:r>
-            <a:r>
-              <a:rPr lang="en-US" sz="1300" b="0" i="1" u="none" strike="noStrike">
-                <a:solidFill>
-                  <a:srgbClr val="FFFFFF"/>
-                </a:solidFill>
-                <a:effectLst/>
-                <a:uFillTx/>
-                <a:latin typeface="Aptos"/>
-                <a:ea typeface="Aptos"/>
-              </a:rPr>
-              <a:t>k</a:t>
-            </a:r>
-            <a:r>
-              <a:rPr lang="en-US" sz="1300" b="0" i="1" u="none" strike="noStrike">
-                <a:solidFill>
-                  <a:srgbClr val="FFFFFF"/>
-                </a:solidFill>
-                <a:effectLst/>
-                <a:uFillTx/>
-                <a:latin typeface="Aptos"/>
-                <a:ea typeface="Aptos"/>
-              </a:rPr>
-              <a:t>l</a:t>
-            </a:r>
-            <a:r>
-              <a:rPr lang="en-US" sz="1300" b="0" i="1" u="none" strike="noStrike">
-                <a:solidFill>
-                  <a:srgbClr val="FFFFFF"/>
-                </a:solidFill>
-                <a:effectLst/>
-                <a:uFillTx/>
-                <a:latin typeface="Aptos"/>
-                <a:ea typeface="Aptos"/>
-              </a:rPr>
-              <a:t>y</a:t>
-            </a:r>
-            <a:r>
-              <a:rPr lang="en-US" sz="1300" b="0" i="1" u="none" strike="noStrike">
-                <a:solidFill>
-                  <a:srgbClr val="FFFFFF"/>
-                </a:solidFill>
-                <a:effectLst/>
-                <a:uFillTx/>
-                <a:latin typeface="Aptos"/>
-                <a:ea typeface="Aptos"/>
-              </a:rPr>
-              <a:t> </a:t>
-            </a:r>
-            <a:r>
-              <a:rPr lang="en-US" sz="1300" b="0" i="1" u="none" strike="noStrike">
-                <a:solidFill>
-                  <a:srgbClr val="FFFFFF"/>
-                </a:solidFill>
-                <a:effectLst/>
-                <a:uFillTx/>
-                <a:latin typeface="Aptos"/>
-                <a:ea typeface="Aptos"/>
-              </a:rPr>
-              <a:t>b</a:t>
-            </a:r>
-            <a:r>
-              <a:rPr lang="en-US" sz="1300" b="0" i="1" u="none" strike="noStrike">
-                <a:solidFill>
-                  <a:srgbClr val="FFFFFF"/>
-                </a:solidFill>
-                <a:effectLst/>
-                <a:uFillTx/>
-                <a:latin typeface="Aptos"/>
-                <a:ea typeface="Aptos"/>
-              </a:rPr>
-              <a:t>e</a:t>
-            </a:r>
-            <a:r>
-              <a:rPr lang="en-US" sz="1300" b="0" i="1" u="none" strike="noStrike">
-                <a:solidFill>
-                  <a:srgbClr val="FFFFFF"/>
-                </a:solidFill>
-                <a:effectLst/>
-                <a:uFillTx/>
-                <a:latin typeface="Aptos"/>
-                <a:ea typeface="Aptos"/>
-              </a:rPr>
-              <a:t>n</a:t>
-            </a:r>
-            <a:r>
-              <a:rPr lang="en-US" sz="1300" b="0" i="1" u="none" strike="noStrike">
-                <a:solidFill>
-                  <a:srgbClr val="FFFFFF"/>
-                </a:solidFill>
-                <a:effectLst/>
-                <a:uFillTx/>
-                <a:latin typeface="Aptos"/>
-                <a:ea typeface="Aptos"/>
-              </a:rPr>
-              <a:t>c</a:t>
-            </a:r>
-            <a:r>
-              <a:rPr lang="en-US" sz="1300" b="0" i="1" u="none" strike="noStrike">
-                <a:solidFill>
-                  <a:srgbClr val="FFFFFF"/>
-                </a:solidFill>
-                <a:effectLst/>
-                <a:uFillTx/>
-                <a:latin typeface="Aptos"/>
-                <a:ea typeface="Aptos"/>
-              </a:rPr>
-              <a:t>h</a:t>
-            </a:r>
-            <a:r>
-              <a:rPr lang="en-US" sz="1300" b="0" i="1" u="none" strike="noStrike">
-                <a:solidFill>
-                  <a:srgbClr val="FFFFFF"/>
-                </a:solidFill>
-                <a:effectLst/>
-                <a:uFillTx/>
-                <a:latin typeface="Aptos"/>
-                <a:ea typeface="Aptos"/>
-              </a:rPr>
-              <a:t> </a:t>
-            </a:r>
-            <a:r>
-              <a:rPr lang="en-US" sz="1300" b="0" i="1" u="none" strike="noStrike">
-                <a:solidFill>
-                  <a:srgbClr val="FFFFFF"/>
-                </a:solidFill>
-                <a:effectLst/>
-                <a:uFillTx/>
-                <a:latin typeface="Aptos"/>
-                <a:ea typeface="Aptos"/>
-              </a:rPr>
-              <a:t>t</a:t>
-            </a:r>
-            <a:r>
-              <a:rPr lang="en-US" sz="1300" b="0" i="1" u="none" strike="noStrike">
-                <a:solidFill>
-                  <a:srgbClr val="FFFFFF"/>
-                </a:solidFill>
-                <a:effectLst/>
-                <a:uFillTx/>
-                <a:latin typeface="Aptos"/>
-                <a:ea typeface="Aptos"/>
-              </a:rPr>
-              <a:t>a</a:t>
-            </a:r>
-            <a:r>
-              <a:rPr lang="en-US" sz="1300" b="0" i="1" u="none" strike="noStrike">
-                <a:solidFill>
-                  <a:srgbClr val="FFFFFF"/>
-                </a:solidFill>
-                <a:effectLst/>
-                <a:uFillTx/>
-                <a:latin typeface="Aptos"/>
-                <a:ea typeface="Aptos"/>
-              </a:rPr>
-              <a:t>l</a:t>
-            </a:r>
-            <a:r>
-              <a:rPr lang="en-US" sz="1300" b="0" i="1" u="none" strike="noStrike">
-                <a:solidFill>
-                  <a:srgbClr val="FFFFFF"/>
-                </a:solidFill>
-                <a:effectLst/>
-                <a:uFillTx/>
-                <a:latin typeface="Aptos"/>
-                <a:ea typeface="Aptos"/>
-              </a:rPr>
-              <a:t>e</a:t>
-            </a:r>
-            <a:r>
-              <a:rPr lang="en-US" sz="1300" b="0" i="1" u="none" strike="noStrike">
-                <a:solidFill>
-                  <a:srgbClr val="FFFFFF"/>
-                </a:solidFill>
-                <a:effectLst/>
-                <a:uFillTx/>
-                <a:latin typeface="Aptos"/>
-                <a:ea typeface="Aptos"/>
-              </a:rPr>
-              <a:t>n</a:t>
-            </a:r>
-            <a:r>
-              <a:rPr lang="en-US" sz="1300" b="0" i="1" u="none" strike="noStrike">
-                <a:solidFill>
-                  <a:srgbClr val="FFFFFF"/>
-                </a:solidFill>
-                <a:effectLst/>
-                <a:uFillTx/>
-                <a:latin typeface="Aptos"/>
-                <a:ea typeface="Aptos"/>
-              </a:rPr>
-              <a:t>t</a:t>
-            </a:r>
-            <a:r>
-              <a:rPr lang="en-US" sz="1300" b="0" i="1" u="none" strike="noStrike">
-                <a:solidFill>
-                  <a:srgbClr val="FFFFFF"/>
-                </a:solidFill>
-                <a:effectLst/>
-                <a:uFillTx/>
-                <a:latin typeface="Aptos"/>
-                <a:ea typeface="Aptos"/>
-              </a:rPr>
-              <a:t> </a:t>
-            </a:r>
-            <a:r>
-              <a:rPr lang="en-US" sz="1300" b="0" i="1" u="none" strike="noStrike">
-                <a:solidFill>
-                  <a:srgbClr val="FFFFFF"/>
-                </a:solidFill>
-                <a:effectLst/>
-                <a:uFillTx/>
-                <a:latin typeface="Aptos"/>
-                <a:ea typeface="Aptos"/>
-              </a:rPr>
-              <a:t>i</a:t>
-            </a:r>
-            <a:r>
-              <a:rPr lang="en-US" sz="1300" b="0" i="1" u="none" strike="noStrike">
-                <a:solidFill>
-                  <a:srgbClr val="FFFFFF"/>
-                </a:solidFill>
-                <a:effectLst/>
-                <a:uFillTx/>
-                <a:latin typeface="Aptos"/>
-                <a:ea typeface="Aptos"/>
-              </a:rPr>
-              <a:t>s</a:t>
-            </a:r>
-            <a:r>
-              <a:rPr lang="en-US" sz="1300" b="0" i="1" u="none" strike="noStrike">
-                <a:solidFill>
-                  <a:srgbClr val="FFFFFF"/>
-                </a:solidFill>
-                <a:effectLst/>
-                <a:uFillTx/>
-                <a:latin typeface="Aptos"/>
-                <a:ea typeface="Aptos"/>
-              </a:rPr>
-              <a:t> </a:t>
-            </a:r>
-            <a:r>
-              <a:rPr lang="en-US" sz="1300" b="0" i="1" u="none" strike="noStrike">
-                <a:solidFill>
-                  <a:srgbClr val="FFFFFF"/>
-                </a:solidFill>
-                <a:effectLst/>
-                <a:uFillTx/>
-                <a:latin typeface="Aptos"/>
-                <a:ea typeface="Aptos"/>
-              </a:rPr>
-              <a:t>d</a:t>
-            </a:r>
-            <a:r>
-              <a:rPr lang="en-US" sz="1300" b="0" i="1" u="none" strike="noStrike">
-                <a:solidFill>
-                  <a:srgbClr val="FFFFFF"/>
-                </a:solidFill>
-                <a:effectLst/>
-                <a:uFillTx/>
-                <a:latin typeface="Aptos"/>
-                <a:ea typeface="Aptos"/>
-              </a:rPr>
-              <a:t>e</a:t>
-            </a:r>
-            <a:r>
-              <a:rPr lang="en-US" sz="1300" b="0" i="1" u="none" strike="noStrike">
-                <a:solidFill>
-                  <a:srgbClr val="FFFFFF"/>
-                </a:solidFill>
-                <a:effectLst/>
-                <a:uFillTx/>
-                <a:latin typeface="Aptos"/>
-                <a:ea typeface="Aptos"/>
-              </a:rPr>
-              <a:t>p</a:t>
-            </a:r>
-            <a:r>
-              <a:rPr lang="en-US" sz="1300" b="0" i="1" u="none" strike="noStrike">
-                <a:solidFill>
-                  <a:srgbClr val="FFFFFF"/>
-                </a:solidFill>
-                <a:effectLst/>
-                <a:uFillTx/>
-                <a:latin typeface="Aptos"/>
-                <a:ea typeface="Aptos"/>
-              </a:rPr>
-              <a:t>l</a:t>
-            </a:r>
-            <a:r>
-              <a:rPr lang="en-US" sz="1300" b="0" i="1" u="none" strike="noStrike">
-                <a:solidFill>
-                  <a:srgbClr val="FFFFFF"/>
-                </a:solidFill>
-                <a:effectLst/>
-                <a:uFillTx/>
-                <a:latin typeface="Aptos"/>
-                <a:ea typeface="Aptos"/>
-              </a:rPr>
-              <a:t>o</a:t>
-            </a:r>
-            <a:r>
-              <a:rPr lang="en-US" sz="1300" b="0" i="1" u="none" strike="noStrike">
-                <a:solidFill>
-                  <a:srgbClr val="FFFFFF"/>
-                </a:solidFill>
-                <a:effectLst/>
-                <a:uFillTx/>
-                <a:latin typeface="Aptos"/>
-                <a:ea typeface="Aptos"/>
-              </a:rPr>
-              <a:t>y</a:t>
-            </a:r>
-            <a:r>
-              <a:rPr lang="en-US" sz="1300" b="0" i="1" u="none" strike="noStrike">
-                <a:solidFill>
-                  <a:srgbClr val="FFFFFF"/>
-                </a:solidFill>
-                <a:effectLst/>
-                <a:uFillTx/>
-                <a:latin typeface="Aptos"/>
-                <a:ea typeface="Aptos"/>
-              </a:rPr>
-              <a:t>e</a:t>
-            </a:r>
-            <a:r>
-              <a:rPr lang="en-US" sz="1300" b="0" i="1" u="none" strike="noStrike">
-                <a:solidFill>
-                  <a:srgbClr val="FFFFFF"/>
-                </a:solidFill>
-                <a:effectLst/>
-                <a:uFillTx/>
-                <a:latin typeface="Aptos"/>
-                <a:ea typeface="Aptos"/>
-              </a:rPr>
-              <a:t>d</a:t>
-            </a:r>
-            <a:r>
-              <a:rPr lang="en-US" sz="1300" b="0" i="1" u="none" strike="noStrike">
-                <a:solidFill>
-                  <a:srgbClr val="FFFFFF"/>
-                </a:solidFill>
-                <a:effectLst/>
-                <a:uFillTx/>
-                <a:latin typeface="Aptos"/>
-                <a:ea typeface="Aptos"/>
-              </a:rPr>
-              <a:t>.</a:t>
+              <a:t>Why this matters: workforce utilization, delivery readiness, and employee engagement all depend on how quickly bench talent is deployed.</a:t>
             </a:r>
             <a:endParaRPr lang="en-US" sz="1300" b="0" u="none" strike="noStrike">
               <a:solidFill>
@@ -5962,7 +4088,7 @@
         <p:spPr>
           <a:xfrm>
             <a:off x="502920" y="6473880"/>
-            <a:ext cx="8046360" cy="228240"/>
+            <a:ext cx="8046000" cy="227880"/>
           </a:xfrm>
           <a:prstGeom prst="rect">
             <a:avLst/>
@@ -6001,295 +4127,7 @@
                 <a:latin typeface="Aptos"/>
                 <a:ea typeface="Aptos"/>
               </a:rPr>
-              <a:t>CL</a:t>
-            </a:r>
-            <a:r>
-              <a:rPr lang="en-US" sz="900" b="1" u="none" spc="99" strike="noStrike">
-                <a:solidFill>
-                  <a:srgbClr val="5B6660"/>
-                </a:solidFill>
-                <a:effectLst/>
-                <a:uFillTx/>
-                <a:latin typeface="Aptos"/>
-                <a:ea typeface="Aptos"/>
-              </a:rPr>
-              <a:t>OV</a:t>
-            </a:r>
-            <a:r>
-              <a:rPr lang="en-US" sz="900" b="1" u="none" spc="99" strike="noStrike">
-                <a:solidFill>
-                  <a:srgbClr val="5B6660"/>
-                </a:solidFill>
-                <a:effectLst/>
-                <a:uFillTx/>
-                <a:latin typeface="Aptos"/>
-                <a:ea typeface="Aptos"/>
-              </a:rPr>
-              <a:t>ER </a:t>
-            </a:r>
-            <a:r>
-              <a:rPr lang="en-US" sz="900" b="1" u="none" spc="99" strike="noStrike">
-                <a:solidFill>
-                  <a:srgbClr val="5B6660"/>
-                </a:solidFill>
-                <a:effectLst/>
-                <a:uFillTx/>
-                <a:latin typeface="Aptos"/>
-                <a:ea typeface="Aptos"/>
-              </a:rPr>
-              <a:t>IN</a:t>
-            </a:r>
-            <a:r>
-              <a:rPr lang="en-US" sz="900" b="1" u="none" spc="99" strike="noStrike">
-                <a:solidFill>
-                  <a:srgbClr val="5B6660"/>
-                </a:solidFill>
-                <a:effectLst/>
-                <a:uFillTx/>
-                <a:latin typeface="Aptos"/>
-                <a:ea typeface="Aptos"/>
-              </a:rPr>
-              <a:t>FO</a:t>
-            </a:r>
-            <a:r>
-              <a:rPr lang="en-US" sz="900" b="1" u="none" spc="99" strike="noStrike">
-                <a:solidFill>
-                  <a:srgbClr val="5B6660"/>
-                </a:solidFill>
-                <a:effectLst/>
-                <a:uFillTx/>
-                <a:latin typeface="Aptos"/>
-                <a:ea typeface="Aptos"/>
-              </a:rPr>
-              <a:t>TE</a:t>
-            </a:r>
-            <a:r>
-              <a:rPr lang="en-US" sz="900" b="1" u="none" spc="99" strike="noStrike">
-                <a:solidFill>
-                  <a:srgbClr val="5B6660"/>
-                </a:solidFill>
-                <a:effectLst/>
-                <a:uFillTx/>
-                <a:latin typeface="Aptos"/>
-                <a:ea typeface="Aptos"/>
-              </a:rPr>
-              <a:t>CH </a:t>
-            </a:r>
-            <a:r>
-              <a:rPr lang="en-US" sz="900" b="1" u="none" spc="99" strike="noStrike">
-                <a:solidFill>
-                  <a:srgbClr val="5B6660"/>
-                </a:solidFill>
-                <a:effectLst/>
-                <a:uFillTx/>
-                <a:latin typeface="Aptos"/>
-                <a:ea typeface="Aptos"/>
-              </a:rPr>
-              <a:t>PV</a:t>
-            </a:r>
-            <a:r>
-              <a:rPr lang="en-US" sz="900" b="1" u="none" spc="99" strike="noStrike">
-                <a:solidFill>
-                  <a:srgbClr val="5B6660"/>
-                </a:solidFill>
-                <a:effectLst/>
-                <a:uFillTx/>
-                <a:latin typeface="Aptos"/>
-                <a:ea typeface="Aptos"/>
-              </a:rPr>
-              <a:t>T </a:t>
-            </a:r>
-            <a:r>
-              <a:rPr lang="en-US" sz="900" b="1" u="none" spc="99" strike="noStrike">
-                <a:solidFill>
-                  <a:srgbClr val="5B6660"/>
-                </a:solidFill>
-                <a:effectLst/>
-                <a:uFillTx/>
-                <a:latin typeface="Aptos"/>
-                <a:ea typeface="Aptos"/>
-              </a:rPr>
-              <a:t>LT</a:t>
-            </a:r>
-            <a:r>
-              <a:rPr lang="en-US" sz="900" b="1" u="none" spc="99" strike="noStrike">
-                <a:solidFill>
-                  <a:srgbClr val="5B6660"/>
-                </a:solidFill>
-                <a:effectLst/>
-                <a:uFillTx/>
-                <a:latin typeface="Aptos"/>
-                <a:ea typeface="Aptos"/>
-              </a:rPr>
-              <a:t>D  </a:t>
-            </a:r>
-            <a:r>
-              <a:rPr lang="en-US" sz="900" b="1" u="none" spc="99" strike="noStrike">
-                <a:solidFill>
-                  <a:srgbClr val="5B6660"/>
-                </a:solidFill>
-                <a:effectLst/>
-                <a:uFillTx/>
-                <a:latin typeface="Aptos"/>
-                <a:ea typeface="Aptos"/>
-              </a:rPr>
-              <a:t>•  </a:t>
-            </a:r>
-            <a:r>
-              <a:rPr lang="en-US" sz="900" b="1" u="none" spc="99" strike="noStrike">
-                <a:solidFill>
-                  <a:srgbClr val="5B6660"/>
-                </a:solidFill>
-                <a:effectLst/>
-                <a:uFillTx/>
-                <a:latin typeface="Aptos"/>
-                <a:ea typeface="Aptos"/>
-              </a:rPr>
-              <a:t>MI</a:t>
-            </a:r>
-            <a:r>
-              <a:rPr lang="en-US" sz="900" b="1" u="none" spc="99" strike="noStrike">
-                <a:solidFill>
-                  <a:srgbClr val="5B6660"/>
-                </a:solidFill>
-                <a:effectLst/>
-                <a:uFillTx/>
-                <a:latin typeface="Aptos"/>
-                <a:ea typeface="Aptos"/>
-              </a:rPr>
-              <a:t>NI </a:t>
-            </a:r>
-            <a:r>
-              <a:rPr lang="en-US" sz="900" b="1" u="none" spc="99" strike="noStrike">
-                <a:solidFill>
-                  <a:srgbClr val="5B6660"/>
-                </a:solidFill>
-                <a:effectLst/>
-                <a:uFillTx/>
-                <a:latin typeface="Aptos"/>
-                <a:ea typeface="Aptos"/>
-              </a:rPr>
-              <a:t>BE</a:t>
-            </a:r>
-            <a:r>
-              <a:rPr lang="en-US" sz="900" b="1" u="none" spc="99" strike="noStrike">
-                <a:solidFill>
-                  <a:srgbClr val="5B6660"/>
-                </a:solidFill>
-                <a:effectLst/>
-                <a:uFillTx/>
-                <a:latin typeface="Aptos"/>
-                <a:ea typeface="Aptos"/>
-              </a:rPr>
-              <a:t>NC</a:t>
-            </a:r>
-            <a:r>
-              <a:rPr lang="en-US" sz="900" b="1" u="none" spc="99" strike="noStrike">
-                <a:solidFill>
-                  <a:srgbClr val="5B6660"/>
-                </a:solidFill>
-                <a:effectLst/>
-                <a:uFillTx/>
-                <a:latin typeface="Aptos"/>
-                <a:ea typeface="Aptos"/>
-              </a:rPr>
-              <a:t>H </a:t>
-            </a:r>
-            <a:r>
-              <a:rPr lang="en-US" sz="900" b="1" u="none" spc="99" strike="noStrike">
-                <a:solidFill>
-                  <a:srgbClr val="5B6660"/>
-                </a:solidFill>
-                <a:effectLst/>
-                <a:uFillTx/>
-                <a:latin typeface="Aptos"/>
-                <a:ea typeface="Aptos"/>
-              </a:rPr>
-              <a:t>DE</a:t>
-            </a:r>
-            <a:r>
-              <a:rPr lang="en-US" sz="900" b="1" u="none" spc="99" strike="noStrike">
-                <a:solidFill>
-                  <a:srgbClr val="5B6660"/>
-                </a:solidFill>
-                <a:effectLst/>
-                <a:uFillTx/>
-                <a:latin typeface="Aptos"/>
-                <a:ea typeface="Aptos"/>
-              </a:rPr>
-              <a:t>PL</a:t>
-            </a:r>
-            <a:r>
-              <a:rPr lang="en-US" sz="900" b="1" u="none" spc="99" strike="noStrike">
-                <a:solidFill>
-                  <a:srgbClr val="5B6660"/>
-                </a:solidFill>
-                <a:effectLst/>
-                <a:uFillTx/>
-                <a:latin typeface="Aptos"/>
-                <a:ea typeface="Aptos"/>
-              </a:rPr>
-              <a:t>OY</a:t>
-            </a:r>
-            <a:r>
-              <a:rPr lang="en-US" sz="900" b="1" u="none" spc="99" strike="noStrike">
-                <a:solidFill>
-                  <a:srgbClr val="5B6660"/>
-                </a:solidFill>
-                <a:effectLst/>
-                <a:uFillTx/>
-                <a:latin typeface="Aptos"/>
-                <a:ea typeface="Aptos"/>
-              </a:rPr>
-              <a:t>ME</a:t>
-            </a:r>
-            <a:r>
-              <a:rPr lang="en-US" sz="900" b="1" u="none" spc="99" strike="noStrike">
-                <a:solidFill>
-                  <a:srgbClr val="5B6660"/>
-                </a:solidFill>
-                <a:effectLst/>
-                <a:uFillTx/>
-                <a:latin typeface="Aptos"/>
-                <a:ea typeface="Aptos"/>
-              </a:rPr>
-              <a:t>NT </a:t>
-            </a:r>
-            <a:r>
-              <a:rPr lang="en-US" sz="900" b="1" u="none" spc="99" strike="noStrike">
-                <a:solidFill>
-                  <a:srgbClr val="5B6660"/>
-                </a:solidFill>
-                <a:effectLst/>
-                <a:uFillTx/>
-                <a:latin typeface="Aptos"/>
-                <a:ea typeface="Aptos"/>
-              </a:rPr>
-              <a:t>SY</a:t>
-            </a:r>
-            <a:r>
-              <a:rPr lang="en-US" sz="900" b="1" u="none" spc="99" strike="noStrike">
-                <a:solidFill>
-                  <a:srgbClr val="5B6660"/>
-                </a:solidFill>
-                <a:effectLst/>
-                <a:uFillTx/>
-                <a:latin typeface="Aptos"/>
-                <a:ea typeface="Aptos"/>
-              </a:rPr>
-              <a:t>ST</a:t>
-            </a:r>
-            <a:r>
-              <a:rPr lang="en-US" sz="900" b="1" u="none" spc="99" strike="noStrike">
-                <a:solidFill>
-                  <a:srgbClr val="5B6660"/>
-                </a:solidFill>
-                <a:effectLst/>
-                <a:uFillTx/>
-                <a:latin typeface="Aptos"/>
-                <a:ea typeface="Aptos"/>
-              </a:rPr>
-              <a:t>EM</a:t>
+              <a:t>CLOVER INFOTECH PVT LTD  •  MINI BENCH DEPLOYMENT SYSTEM</a:t>
             </a:r>
             <a:endParaRPr lang="en-US" sz="900" b="0" u="none" strike="noStrike">
               <a:solidFill>
@@ -6311,7 +4149,7 @@
         <p:spPr>
           <a:xfrm>
             <a:off x="11064240" y="6446520"/>
-            <a:ext cx="548280" cy="228240"/>
+            <a:ext cx="547920" cy="227880"/>
           </a:xfrm>
           <a:prstGeom prst="rect">
             <a:avLst/>
@@ -6409,7 +4247,7 @@
         <p:spPr>
           <a:xfrm>
             <a:off x="0" y="0"/>
-            <a:ext cx="91080" cy="6857640"/>
+            <a:ext cx="90720" cy="6857280"/>
           </a:xfrm>
           <a:prstGeom prst="rect">
             <a:avLst/>
@@ -6428,7 +4266,7 @@
           <a:fontRef idx="minor"/>
         </p:style>
         <p:txBody>
-          <a:bodyPr lIns="90000" tIns="45000" rIns="90000" bIns="45000" anchor="t">
+          <a:bodyPr lIns="45360" tIns="45000" rIns="45360" bIns="45000" anchor="t">
             <a:noAutofit/>
           </a:bodyPr>
           <a:p>
@@ -6452,7 +4290,7 @@
         <p:spPr>
           <a:xfrm>
             <a:off x="594360" y="292680"/>
-            <a:ext cx="10789560" cy="502560"/>
+            <a:ext cx="10789200" cy="502200"/>
           </a:xfrm>
           <a:prstGeom prst="rect">
             <a:avLst/>
@@ -6513,7 +4351,7 @@
         <p:spPr>
           <a:xfrm>
             <a:off x="594360" y="960120"/>
-            <a:ext cx="3002040" cy="248400"/>
+            <a:ext cx="3001680" cy="248040"/>
           </a:xfrm>
           <a:prstGeom prst="rect">
             <a:avLst/>
@@ -6574,7 +4412,7 @@
         <p:spPr>
           <a:xfrm>
             <a:off x="594360" y="1258560"/>
-            <a:ext cx="3015360" cy="853920"/>
+            <a:ext cx="3015000" cy="853560"/>
           </a:xfrm>
           <a:prstGeom prst="roundRect">
             <a:avLst>
@@ -6622,7 +4460,7 @@
         <p:spPr>
           <a:xfrm>
             <a:off x="756000" y="1418760"/>
-            <a:ext cx="538200" cy="533880"/>
+            <a:ext cx="537840" cy="533520"/>
           </a:xfrm>
           <a:prstGeom prst="ellipse">
             <a:avLst/>
@@ -6669,7 +4507,7 @@
         <p:spPr>
           <a:xfrm>
             <a:off x="815040" y="1477800"/>
-            <a:ext cx="420120" cy="416520"/>
+            <a:ext cx="419760" cy="416160"/>
           </a:xfrm>
           <a:prstGeom prst="rect">
             <a:avLst/>
@@ -6689,7 +4527,7 @@
         <p:spPr>
           <a:xfrm>
             <a:off x="1402200" y="1430640"/>
-            <a:ext cx="2045880" cy="286920"/>
+            <a:ext cx="2045520" cy="286560"/>
           </a:xfrm>
           <a:prstGeom prst="rect">
             <a:avLst/>
@@ -6707,7 +4545,7 @@
         </p:style>
         <p:txBody>
           <a:bodyPr lIns="90000" tIns="45000" rIns="90000" bIns="45000" anchor="b">
-            <a:normAutofit/>
+            <a:normAutofit lnSpcReduction="9999"/>
           </a:bodyPr>
           <a:p>
             <a:pPr defTabSz="914400">
@@ -6750,7 +4588,7 @@
         <p:spPr>
           <a:xfrm>
             <a:off x="1402200" y="1707480"/>
-            <a:ext cx="2045880" cy="319680"/>
+            <a:ext cx="2045520" cy="319320"/>
           </a:xfrm>
           <a:prstGeom prst="rect">
             <a:avLst/>
@@ -6811,7 +4649,7 @@
         <p:spPr>
           <a:xfrm>
             <a:off x="3933000" y="1258560"/>
-            <a:ext cx="3015360" cy="853920"/>
+            <a:ext cx="3015000" cy="853560"/>
           </a:xfrm>
           <a:prstGeom prst="roundRect">
             <a:avLst>
@@ -6859,7 +4697,7 @@
         <p:spPr>
           <a:xfrm>
             <a:off x="4094640" y="1418760"/>
-            <a:ext cx="538200" cy="533880"/>
+            <a:ext cx="537840" cy="533520"/>
           </a:xfrm>
           <a:prstGeom prst="ellipse">
             <a:avLst/>
@@ -6906,7 +4744,7 @@
         <p:spPr>
           <a:xfrm>
             <a:off x="4154040" y="1477800"/>
-            <a:ext cx="419760" cy="416520"/>
+            <a:ext cx="419400" cy="416160"/>
           </a:xfrm>
           <a:prstGeom prst="rect">
             <a:avLst/>
@@ -6926,7 +4764,7 @@
         <p:spPr>
           <a:xfrm>
             <a:off x="4740840" y="1430640"/>
-            <a:ext cx="2045880" cy="286920"/>
+            <a:ext cx="2045520" cy="286560"/>
           </a:xfrm>
           <a:prstGeom prst="rect">
             <a:avLst/>
@@ -6944,7 +4782,7 @@
         </p:style>
         <p:txBody>
           <a:bodyPr lIns="90000" tIns="45000" rIns="90000" bIns="45000" anchor="b">
-            <a:normAutofit/>
+            <a:normAutofit lnSpcReduction="9999"/>
           </a:bodyPr>
           <a:p>
             <a:pPr defTabSz="914400">
@@ -6987,7 +4825,7 @@
         <p:spPr>
           <a:xfrm>
             <a:off x="4740840" y="1707480"/>
-            <a:ext cx="2045880" cy="319680"/>
+            <a:ext cx="2045520" cy="319320"/>
           </a:xfrm>
           <a:prstGeom prst="rect">
             <a:avLst/>
@@ -7048,7 +4886,7 @@
         <p:spPr>
           <a:xfrm>
             <a:off x="7271640" y="1258560"/>
-            <a:ext cx="3015360" cy="853920"/>
+            <a:ext cx="3015000" cy="853560"/>
           </a:xfrm>
           <a:prstGeom prst="roundRect">
             <a:avLst>
@@ -7096,7 +4934,7 @@
         <p:spPr>
           <a:xfrm>
             <a:off x="7433280" y="1418760"/>
-            <a:ext cx="538200" cy="533880"/>
+            <a:ext cx="537840" cy="533520"/>
           </a:xfrm>
           <a:prstGeom prst="ellipse">
             <a:avLst/>
@@ -7143,7 +4981,7 @@
         <p:spPr>
           <a:xfrm>
             <a:off x="7492680" y="1477800"/>
-            <a:ext cx="419760" cy="416520"/>
+            <a:ext cx="419400" cy="416160"/>
           </a:xfrm>
           <a:prstGeom prst="rect">
             <a:avLst/>
@@ -7163,7 +5001,7 @@
         <p:spPr>
           <a:xfrm>
             <a:off x="8079480" y="1430640"/>
-            <a:ext cx="2045880" cy="286920"/>
+            <a:ext cx="2045520" cy="286560"/>
           </a:xfrm>
           <a:prstGeom prst="rect">
             <a:avLst/>
@@ -7181,7 +5019,7 @@
         </p:style>
         <p:txBody>
           <a:bodyPr lIns="90000" tIns="45000" rIns="90000" bIns="45000" anchor="b">
-            <a:normAutofit/>
+            <a:normAutofit lnSpcReduction="9999"/>
           </a:bodyPr>
           <a:p>
             <a:pPr defTabSz="914400">
@@ -7224,7 +5062,7 @@
         <p:spPr>
           <a:xfrm>
             <a:off x="8079480" y="1707480"/>
-            <a:ext cx="2045880" cy="319680"/>
+            <a:ext cx="2045520" cy="319320"/>
           </a:xfrm>
           <a:prstGeom prst="rect">
             <a:avLst/>
@@ -7285,7 +5123,7 @@
         <p:spPr>
           <a:xfrm>
             <a:off x="594360" y="2294640"/>
-            <a:ext cx="4307760" cy="266760"/>
+            <a:ext cx="4307400" cy="266400"/>
           </a:xfrm>
           <a:prstGeom prst="rect">
             <a:avLst/>
@@ -7346,7 +5184,7 @@
         <p:spPr>
           <a:xfrm>
             <a:off x="594360" y="2615400"/>
-            <a:ext cx="9692640" cy="448200"/>
+            <a:ext cx="9692280" cy="447840"/>
           </a:xfrm>
           <a:prstGeom prst="roundRect">
             <a:avLst>
@@ -7394,7 +5232,7 @@
         <p:spPr>
           <a:xfrm>
             <a:off x="723600" y="2679480"/>
-            <a:ext cx="322920" cy="319680"/>
+            <a:ext cx="322560" cy="319320"/>
           </a:xfrm>
           <a:prstGeom prst="ellipse">
             <a:avLst/>
@@ -7441,7 +5279,7 @@
         <p:spPr>
           <a:xfrm>
             <a:off x="759240" y="2714760"/>
-            <a:ext cx="251640" cy="249120"/>
+            <a:ext cx="251280" cy="248760"/>
           </a:xfrm>
           <a:prstGeom prst="rect">
             <a:avLst/>
@@ -7461,7 +5299,7 @@
         <p:spPr>
           <a:xfrm>
             <a:off x="1186560" y="2615400"/>
-            <a:ext cx="2476800" cy="448200"/>
+            <a:ext cx="2476440" cy="447840"/>
           </a:xfrm>
           <a:prstGeom prst="rect">
             <a:avLst/>
@@ -7522,7 +5360,7 @@
         <p:spPr>
           <a:xfrm>
             <a:off x="3717720" y="2615400"/>
-            <a:ext cx="6354000" cy="448200"/>
+            <a:ext cx="6353640" cy="447840"/>
           </a:xfrm>
           <a:prstGeom prst="rect">
             <a:avLst/>
@@ -7583,7 +5421,7 @@
         <p:spPr>
           <a:xfrm>
             <a:off x="594360" y="3149640"/>
-            <a:ext cx="9692640" cy="447840"/>
+            <a:ext cx="9692280" cy="447480"/>
           </a:xfrm>
           <a:prstGeom prst="roundRect">
             <a:avLst>
@@ -7631,7 +5469,7 @@
         <p:spPr>
           <a:xfrm>
             <a:off x="723600" y="3213360"/>
-            <a:ext cx="322920" cy="320040"/>
+            <a:ext cx="322560" cy="319680"/>
           </a:xfrm>
           <a:prstGeom prst="ellipse">
             <a:avLst/>
@@ -7678,7 +5516,7 @@
         <p:spPr>
           <a:xfrm>
             <a:off x="759240" y="3248640"/>
-            <a:ext cx="251640" cy="249480"/>
+            <a:ext cx="251280" cy="249120"/>
           </a:xfrm>
           <a:prstGeom prst="rect">
             <a:avLst/>
@@ -7698,7 +5536,7 @@
         <p:spPr>
           <a:xfrm>
             <a:off x="1186560" y="3149640"/>
-            <a:ext cx="2476800" cy="447840"/>
+            <a:ext cx="2476440" cy="447480"/>
           </a:xfrm>
           <a:prstGeom prst="rect">
             <a:avLst/>
@@ -7759,7 +5597,7 @@
         <p:spPr>
           <a:xfrm>
             <a:off x="3717720" y="3149640"/>
-            <a:ext cx="6354000" cy="447840"/>
+            <a:ext cx="6353640" cy="447480"/>
           </a:xfrm>
           <a:prstGeom prst="rect">
             <a:avLst/>
@@ -7820,7 +5658,7 @@
         <p:spPr>
           <a:xfrm>
             <a:off x="594360" y="3683520"/>
-            <a:ext cx="9692640" cy="448560"/>
+            <a:ext cx="9692280" cy="448200"/>
           </a:xfrm>
           <a:prstGeom prst="roundRect">
             <a:avLst>
@@ -7868,7 +5706,7 @@
         <p:spPr>
           <a:xfrm>
             <a:off x="723600" y="3747600"/>
-            <a:ext cx="322920" cy="319680"/>
+            <a:ext cx="322560" cy="319320"/>
           </a:xfrm>
           <a:prstGeom prst="ellipse">
             <a:avLst/>
@@ -7915,7 +5753,7 @@
         <p:spPr>
           <a:xfrm>
             <a:off x="759240" y="3782880"/>
-            <a:ext cx="251640" cy="249480"/>
+            <a:ext cx="251280" cy="249120"/>
           </a:xfrm>
           <a:prstGeom prst="rect">
             <a:avLst/>
@@ -7935,7 +5773,7 @@
         <p:spPr>
           <a:xfrm>
             <a:off x="1186560" y="3683520"/>
-            <a:ext cx="2476800" cy="448560"/>
+            <a:ext cx="2476440" cy="448200"/>
           </a:xfrm>
           <a:prstGeom prst="rect">
             <a:avLst/>
@@ -7996,7 +5834,7 @@
         <p:spPr>
           <a:xfrm>
             <a:off x="3717720" y="3683520"/>
-            <a:ext cx="6354000" cy="448560"/>
+            <a:ext cx="6353640" cy="448200"/>
           </a:xfrm>
           <a:prstGeom prst="rect">
             <a:avLst/>
@@ -8057,7 +5895,7 @@
         <p:spPr>
           <a:xfrm>
             <a:off x="594360" y="4271040"/>
-            <a:ext cx="9692640" cy="768600"/>
+            <a:ext cx="9692280" cy="768240"/>
           </a:xfrm>
           <a:prstGeom prst="roundRect">
             <a:avLst>
@@ -8105,7 +5943,7 @@
         <p:spPr>
           <a:xfrm>
             <a:off x="766440" y="4388400"/>
-            <a:ext cx="538200" cy="533880"/>
+            <a:ext cx="537840" cy="533520"/>
           </a:xfrm>
           <a:prstGeom prst="ellipse">
             <a:avLst/>
@@ -8152,7 +5990,7 @@
         <p:spPr>
           <a:xfrm>
             <a:off x="826200" y="4447440"/>
-            <a:ext cx="419400" cy="416520"/>
+            <a:ext cx="419040" cy="416160"/>
           </a:xfrm>
           <a:prstGeom prst="rect">
             <a:avLst/>
@@ -8172,7 +6010,7 @@
         <p:spPr>
           <a:xfrm>
             <a:off x="1509840" y="4356720"/>
-            <a:ext cx="8507880" cy="320040"/>
+            <a:ext cx="8507520" cy="319680"/>
           </a:xfrm>
           <a:prstGeom prst="rect">
             <a:avLst/>
@@ -8233,7 +6071,7 @@
         <p:spPr>
           <a:xfrm>
             <a:off x="1509840" y="4655520"/>
-            <a:ext cx="8507880" cy="341280"/>
+            <a:ext cx="8507520" cy="340920"/>
           </a:xfrm>
           <a:prstGeom prst="rect">
             <a:avLst/>
@@ -8294,7 +6132,7 @@
         <p:spPr>
           <a:xfrm>
             <a:off x="594360" y="5232600"/>
-            <a:ext cx="3230640" cy="266400"/>
+            <a:ext cx="3230280" cy="266040"/>
           </a:xfrm>
           <a:prstGeom prst="rect">
             <a:avLst/>
@@ -8355,7 +6193,7 @@
         <p:spPr>
           <a:xfrm>
             <a:off x="594360" y="5553360"/>
-            <a:ext cx="4684680" cy="618840"/>
+            <a:ext cx="4684320" cy="618480"/>
           </a:xfrm>
           <a:prstGeom prst="roundRect">
             <a:avLst>
@@ -8403,7 +6241,7 @@
         <p:spPr>
           <a:xfrm>
             <a:off x="745560" y="5649120"/>
-            <a:ext cx="430200" cy="426960"/>
+            <a:ext cx="429840" cy="426600"/>
           </a:xfrm>
           <a:prstGeom prst="ellipse">
             <a:avLst/>
@@ -8450,7 +6288,7 @@
         <p:spPr>
           <a:xfrm>
             <a:off x="792360" y="5695920"/>
-            <a:ext cx="335520" cy="333000"/>
+            <a:ext cx="335160" cy="332640"/>
           </a:xfrm>
           <a:prstGeom prst="rect">
             <a:avLst/>
@@ -8470,7 +6308,7 @@
         <p:spPr>
           <a:xfrm>
             <a:off x="1294560" y="5585040"/>
-            <a:ext cx="3822840" cy="320040"/>
+            <a:ext cx="3822480" cy="319680"/>
           </a:xfrm>
           <a:prstGeom prst="rect">
             <a:avLst/>
@@ -8531,7 +6369,7 @@
         <p:spPr>
           <a:xfrm>
             <a:off x="1294560" y="5895000"/>
-            <a:ext cx="3822840" cy="255960"/>
+            <a:ext cx="3822480" cy="255600"/>
           </a:xfrm>
           <a:prstGeom prst="rect">
             <a:avLst/>
@@ -8592,7 +6430,7 @@
         <p:spPr>
           <a:xfrm>
             <a:off x="5602320" y="5553360"/>
-            <a:ext cx="4684680" cy="618840"/>
+            <a:ext cx="4684320" cy="618480"/>
           </a:xfrm>
           <a:prstGeom prst="roundRect">
             <a:avLst>
@@ -8640,7 +6478,7 @@
         <p:spPr>
           <a:xfrm>
             <a:off x="5753520" y="5649120"/>
-            <a:ext cx="430560" cy="426960"/>
+            <a:ext cx="430200" cy="426600"/>
           </a:xfrm>
           <a:prstGeom prst="ellipse">
             <a:avLst/>
@@ -8687,7 +6525,7 @@
         <p:spPr>
           <a:xfrm>
             <a:off x="5800320" y="5695920"/>
-            <a:ext cx="335520" cy="333000"/>
+            <a:ext cx="335160" cy="332640"/>
           </a:xfrm>
           <a:prstGeom prst="rect">
             <a:avLst/>
@@ -8707,7 +6545,7 @@
         <p:spPr>
           <a:xfrm>
             <a:off x="6302520" y="5585040"/>
-            <a:ext cx="3822840" cy="320040"/>
+            <a:ext cx="3822480" cy="319680"/>
           </a:xfrm>
           <a:prstGeom prst="rect">
             <a:avLst/>
@@ -8768,7 +6606,7 @@
         <p:spPr>
           <a:xfrm>
             <a:off x="6302520" y="5895000"/>
-            <a:ext cx="3822840" cy="255960"/>
+            <a:ext cx="3822480" cy="255600"/>
           </a:xfrm>
           <a:prstGeom prst="rect">
             <a:avLst/>
@@ -8829,7 +6667,7 @@
         <p:spPr>
           <a:xfrm>
             <a:off x="502920" y="6473880"/>
-            <a:ext cx="8046360" cy="228240"/>
+            <a:ext cx="8046000" cy="227880"/>
           </a:xfrm>
           <a:prstGeom prst="rect">
             <a:avLst/>
@@ -8868,19 +6706,7 @@
                 <a:latin typeface="Aptos"/>
                 <a:ea typeface="Aptos"/>
               </a:rPr>
-              <a:t>CLOVER INFOTECH PVT LTD  •  MINI </a:t>
-            </a:r>
-            <a:r>
-              <a:rPr lang="en-US" sz="900" b="1" u="none" spc="99" strike="noStrike">
-                <a:solidFill>
-                  <a:srgbClr val="5B6660"/>
-                </a:solidFill>
-                <a:effectLst/>
-                <a:uFillTx/>
-                <a:latin typeface="Aptos"/>
-                <a:ea typeface="Aptos"/>
-              </a:rPr>
-              <a:t>BENCH DEPLOYMENT SYSTEM</a:t>
+              <a:t>CLOVER INFOTECH PVT LTD  •  MINI BENCH DEPLOYMENT SYSTEM</a:t>
             </a:r>
             <a:endParaRPr lang="en-US" sz="900" b="0" u="none" strike="noStrike">
               <a:solidFill>
@@ -8902,7 +6728,7 @@
         <p:spPr>
           <a:xfrm>
             <a:off x="11064240" y="6446520"/>
-            <a:ext cx="548280" cy="228240"/>
+            <a:ext cx="547920" cy="227880"/>
           </a:xfrm>
           <a:prstGeom prst="rect">
             <a:avLst/>
@@ -9000,7 +6826,7 @@
         <p:spPr>
           <a:xfrm>
             <a:off x="0" y="0"/>
-            <a:ext cx="91080" cy="6857640"/>
+            <a:ext cx="90720" cy="6857280"/>
           </a:xfrm>
           <a:prstGeom prst="rect">
             <a:avLst/>
@@ -9019,7 +6845,7 @@
           <a:fontRef idx="minor"/>
         </p:style>
         <p:txBody>
-          <a:bodyPr lIns="90000" tIns="45000" rIns="90000" bIns="45000" anchor="t">
+          <a:bodyPr lIns="45360" tIns="45000" rIns="45360" bIns="45000" anchor="t">
             <a:noAutofit/>
           </a:bodyPr>
           <a:p>
@@ -9043,7 +6869,7 @@
         <p:spPr>
           <a:xfrm>
             <a:off x="594360" y="384120"/>
-            <a:ext cx="10972440" cy="594000"/>
+            <a:ext cx="10972080" cy="593640"/>
           </a:xfrm>
           <a:prstGeom prst="rect">
             <a:avLst/>
@@ -9104,7 +6930,7 @@
         <p:spPr>
           <a:xfrm>
             <a:off x="502920" y="1371600"/>
-            <a:ext cx="5394600" cy="5102280"/>
+            <a:ext cx="5394240" cy="5101920"/>
           </a:xfrm>
           <a:prstGeom prst="roundRect">
             <a:avLst>
@@ -9152,7 +6978,7 @@
         <p:spPr>
           <a:xfrm>
             <a:off x="777240" y="1627560"/>
-            <a:ext cx="383760" cy="383760"/>
+            <a:ext cx="383400" cy="383400"/>
           </a:xfrm>
           <a:prstGeom prst="ellipse">
             <a:avLst/>
@@ -9199,7 +7025,7 @@
         <p:spPr>
           <a:xfrm>
             <a:off x="819360" y="1670040"/>
-            <a:ext cx="299160" cy="299160"/>
+            <a:ext cx="298800" cy="298800"/>
           </a:xfrm>
           <a:prstGeom prst="rect">
             <a:avLst/>
@@ -9219,7 +7045,7 @@
         <p:spPr>
           <a:xfrm>
             <a:off x="1280160" y="1600200"/>
-            <a:ext cx="4388760" cy="438480"/>
+            <a:ext cx="4388400" cy="438120"/>
           </a:xfrm>
           <a:prstGeom prst="rect">
             <a:avLst/>
@@ -9280,7 +7106,7 @@
         <p:spPr>
           <a:xfrm>
             <a:off x="777240" y="2240280"/>
-            <a:ext cx="4845960" cy="914040"/>
+            <a:ext cx="4845600" cy="913680"/>
           </a:xfrm>
           <a:prstGeom prst="roundRect">
             <a:avLst>
@@ -9328,7 +7154,7 @@
         <p:spPr>
           <a:xfrm>
             <a:off x="1005840" y="2240280"/>
-            <a:ext cx="2422800" cy="914040"/>
+            <a:ext cx="2422440" cy="913680"/>
           </a:xfrm>
           <a:prstGeom prst="rect">
             <a:avLst/>
@@ -9389,7 +7215,7 @@
         <p:spPr>
           <a:xfrm>
             <a:off x="3200400" y="2240280"/>
-            <a:ext cx="2325960" cy="914040"/>
+            <a:ext cx="2325600" cy="913680"/>
           </a:xfrm>
           <a:prstGeom prst="rect">
             <a:avLst/>
@@ -9450,7 +7276,7 @@
         <p:spPr>
           <a:xfrm>
             <a:off x="777240" y="3273480"/>
-            <a:ext cx="4845960" cy="914040"/>
+            <a:ext cx="4845600" cy="913680"/>
           </a:xfrm>
           <a:prstGeom prst="roundRect">
             <a:avLst>
@@ -9498,7 +7324,7 @@
         <p:spPr>
           <a:xfrm>
             <a:off x="1005840" y="3273480"/>
-            <a:ext cx="2422800" cy="914040"/>
+            <a:ext cx="2422440" cy="913680"/>
           </a:xfrm>
           <a:prstGeom prst="rect">
             <a:avLst/>
@@ -9559,7 +7385,7 @@
         <p:spPr>
           <a:xfrm>
             <a:off x="3200400" y="3273480"/>
-            <a:ext cx="2325960" cy="914040"/>
+            <a:ext cx="2325600" cy="913680"/>
           </a:xfrm>
           <a:prstGeom prst="rect">
             <a:avLst/>
@@ -9620,7 +7446,7 @@
         <p:spPr>
           <a:xfrm>
             <a:off x="777240" y="4306680"/>
-            <a:ext cx="4845960" cy="914040"/>
+            <a:ext cx="4845600" cy="913680"/>
           </a:xfrm>
           <a:prstGeom prst="roundRect">
             <a:avLst>
@@ -9668,7 +7494,7 @@
         <p:spPr>
           <a:xfrm>
             <a:off x="1005840" y="4306680"/>
-            <a:ext cx="2422800" cy="914040"/>
+            <a:ext cx="2422440" cy="913680"/>
           </a:xfrm>
           <a:prstGeom prst="rect">
             <a:avLst/>
@@ -9729,7 +7555,7 @@
         <p:spPr>
           <a:xfrm>
             <a:off x="3200400" y="4306680"/>
-            <a:ext cx="2325960" cy="914040"/>
+            <a:ext cx="2325600" cy="913680"/>
           </a:xfrm>
           <a:prstGeom prst="rect">
             <a:avLst/>
@@ -9790,7 +7616,7 @@
         <p:spPr>
           <a:xfrm>
             <a:off x="777240" y="5340240"/>
-            <a:ext cx="4845960" cy="914040"/>
+            <a:ext cx="4845600" cy="913680"/>
           </a:xfrm>
           <a:prstGeom prst="roundRect">
             <a:avLst>
@@ -9838,7 +7664,7 @@
         <p:spPr>
           <a:xfrm>
             <a:off x="1005840" y="5340240"/>
-            <a:ext cx="2422800" cy="914040"/>
+            <a:ext cx="2422440" cy="913680"/>
           </a:xfrm>
           <a:prstGeom prst="rect">
             <a:avLst/>
@@ -9899,7 +7725,7 @@
         <p:spPr>
           <a:xfrm>
             <a:off x="3200400" y="5340240"/>
-            <a:ext cx="2325960" cy="914040"/>
+            <a:ext cx="2325600" cy="913680"/>
           </a:xfrm>
           <a:prstGeom prst="rect">
             <a:avLst/>
@@ -9960,7 +7786,7 @@
         <p:spPr>
           <a:xfrm>
             <a:off x="6172200" y="1371600"/>
-            <a:ext cx="5513400" cy="5029200"/>
+            <a:ext cx="5513040" cy="5028840"/>
           </a:xfrm>
           <a:prstGeom prst="roundRect">
             <a:avLst>
@@ -10008,7 +7834,7 @@
         <p:spPr>
           <a:xfrm>
             <a:off x="6446520" y="1627560"/>
-            <a:ext cx="383760" cy="383760"/>
+            <a:ext cx="383400" cy="383400"/>
           </a:xfrm>
           <a:prstGeom prst="ellipse">
             <a:avLst/>
@@ -10055,7 +7881,7 @@
         <p:spPr>
           <a:xfrm>
             <a:off x="6488640" y="1670040"/>
-            <a:ext cx="299160" cy="299160"/>
+            <a:ext cx="298800" cy="298800"/>
           </a:xfrm>
           <a:prstGeom prst="rect">
             <a:avLst/>
@@ -10075,7 +7901,7 @@
         <p:spPr>
           <a:xfrm>
             <a:off x="6949440" y="1600200"/>
-            <a:ext cx="4507560" cy="438480"/>
+            <a:ext cx="4507200" cy="438120"/>
           </a:xfrm>
           <a:prstGeom prst="rect">
             <a:avLst/>
@@ -10136,7 +7962,7 @@
         <p:spPr>
           <a:xfrm>
             <a:off x="6446520" y="2240280"/>
-            <a:ext cx="310680" cy="310680"/>
+            <a:ext cx="310320" cy="310320"/>
           </a:xfrm>
           <a:prstGeom prst="ellipse">
             <a:avLst/>
@@ -10179,7 +8005,7 @@
         <p:spPr>
           <a:xfrm>
             <a:off x="6446520" y="2240280"/>
-            <a:ext cx="310680" cy="310680"/>
+            <a:ext cx="310320" cy="310320"/>
           </a:xfrm>
           <a:prstGeom prst="rect">
             <a:avLst/>
@@ -10240,7 +8066,7 @@
         <p:spPr>
           <a:xfrm>
             <a:off x="6903720" y="2212920"/>
-            <a:ext cx="4507560" cy="365400"/>
+            <a:ext cx="4507200" cy="365040"/>
           </a:xfrm>
           <a:prstGeom prst="rect">
             <a:avLst/>
@@ -10301,7 +8127,7 @@
         <p:spPr>
           <a:xfrm>
             <a:off x="6903720" y="2642760"/>
-            <a:ext cx="4507560" cy="383760"/>
+            <a:ext cx="4507200" cy="383400"/>
           </a:xfrm>
           <a:prstGeom prst="rect">
             <a:avLst/>
@@ -10374,7 +8200,7 @@
         <p:spPr>
           <a:xfrm>
             <a:off x="6903720" y="3026520"/>
-            <a:ext cx="4507560" cy="383760"/>
+            <a:ext cx="4507200" cy="383400"/>
           </a:xfrm>
           <a:prstGeom prst="rect">
             <a:avLst/>
@@ -10502,7 +8328,7 @@
         <p:spPr>
           <a:xfrm>
             <a:off x="6446520" y="3684960"/>
-            <a:ext cx="310680" cy="310680"/>
+            <a:ext cx="310320" cy="310320"/>
           </a:xfrm>
           <a:prstGeom prst="ellipse">
             <a:avLst/>
@@ -10545,7 +8371,7 @@
         <p:spPr>
           <a:xfrm>
             <a:off x="6446520" y="3684960"/>
-            <a:ext cx="310680" cy="310680"/>
+            <a:ext cx="310320" cy="310320"/>
           </a:xfrm>
           <a:prstGeom prst="rect">
             <a:avLst/>
@@ -10606,7 +8432,7 @@
         <p:spPr>
           <a:xfrm>
             <a:off x="6903720" y="3657600"/>
-            <a:ext cx="4507560" cy="365400"/>
+            <a:ext cx="4507200" cy="365040"/>
           </a:xfrm>
           <a:prstGeom prst="rect">
             <a:avLst/>
@@ -10667,7 +8493,7 @@
         <p:spPr>
           <a:xfrm>
             <a:off x="6903720" y="4087440"/>
-            <a:ext cx="4507560" cy="383760"/>
+            <a:ext cx="4507200" cy="383400"/>
           </a:xfrm>
           <a:prstGeom prst="rect">
             <a:avLst/>
@@ -10728,7 +8554,7 @@
         <p:spPr>
           <a:xfrm>
             <a:off x="6903720" y="4471560"/>
-            <a:ext cx="4507560" cy="383760"/>
+            <a:ext cx="4507200" cy="383400"/>
           </a:xfrm>
           <a:prstGeom prst="rect">
             <a:avLst/>
@@ -10856,7 +8682,7 @@
         <p:spPr>
           <a:xfrm>
             <a:off x="6446520" y="5129640"/>
-            <a:ext cx="310680" cy="310680"/>
+            <a:ext cx="310320" cy="310320"/>
           </a:xfrm>
           <a:prstGeom prst="ellipse">
             <a:avLst/>
@@ -10899,7 +8725,7 @@
         <p:spPr>
           <a:xfrm>
             <a:off x="6446520" y="5129640"/>
-            <a:ext cx="310680" cy="310680"/>
+            <a:ext cx="310320" cy="310320"/>
           </a:xfrm>
           <a:prstGeom prst="rect">
             <a:avLst/>
@@ -10960,7 +8786,7 @@
         <p:spPr>
           <a:xfrm>
             <a:off x="6903720" y="5102280"/>
-            <a:ext cx="4507560" cy="365400"/>
+            <a:ext cx="4507200" cy="365040"/>
           </a:xfrm>
           <a:prstGeom prst="rect">
             <a:avLst/>
@@ -11021,7 +8847,7 @@
         <p:spPr>
           <a:xfrm>
             <a:off x="6903720" y="5532120"/>
-            <a:ext cx="4507560" cy="383760"/>
+            <a:ext cx="4507200" cy="383400"/>
           </a:xfrm>
           <a:prstGeom prst="rect">
             <a:avLst/>
@@ -11094,7 +8920,7 @@
         <p:spPr>
           <a:xfrm>
             <a:off x="6903720" y="5916240"/>
-            <a:ext cx="4507560" cy="383760"/>
+            <a:ext cx="4507200" cy="383400"/>
           </a:xfrm>
           <a:prstGeom prst="rect">
             <a:avLst/>
@@ -11155,7 +8981,7 @@
         <p:spPr>
           <a:xfrm>
             <a:off x="502920" y="6473880"/>
-            <a:ext cx="8046360" cy="228240"/>
+            <a:ext cx="8046000" cy="227880"/>
           </a:xfrm>
           <a:prstGeom prst="rect">
             <a:avLst/>
@@ -11216,7 +9042,7 @@
         <p:spPr>
           <a:xfrm>
             <a:off x="11064240" y="6446520"/>
-            <a:ext cx="548280" cy="228240"/>
+            <a:ext cx="547920" cy="227880"/>
           </a:xfrm>
           <a:prstGeom prst="rect">
             <a:avLst/>
@@ -11255,7 +9081,7 @@
                 <a:latin typeface="Aptos"/>
                 <a:ea typeface="Aptos"/>
               </a:rPr>
-              <a:t>06</a:t>
+              <a:t>04</a:t>
             </a:r>
             <a:endParaRPr lang="en-US" sz="1000" b="0" u="none" strike="noStrike">
               <a:solidFill>
@@ -11314,7 +9140,7 @@
         <p:spPr>
           <a:xfrm>
             <a:off x="0" y="0"/>
-            <a:ext cx="91080" cy="6857640"/>
+            <a:ext cx="90720" cy="6857280"/>
           </a:xfrm>
           <a:prstGeom prst="rect">
             <a:avLst/>
@@ -11333,7 +9159,7 @@
           <a:fontRef idx="minor"/>
         </p:style>
         <p:txBody>
-          <a:bodyPr lIns="90000" tIns="45000" rIns="90000" bIns="45000" anchor="t">
+          <a:bodyPr lIns="45360" tIns="45000" rIns="45360" bIns="45000" anchor="t">
             <a:noAutofit/>
           </a:bodyPr>
           <a:p>
@@ -11357,7 +9183,7 @@
         <p:spPr>
           <a:xfrm>
             <a:off x="594360" y="384120"/>
-            <a:ext cx="10789560" cy="594000"/>
+            <a:ext cx="10789200" cy="593640"/>
           </a:xfrm>
           <a:prstGeom prst="rect">
             <a:avLst/>
@@ -11418,7 +9244,7 @@
         <p:spPr>
           <a:xfrm>
             <a:off x="594360" y="1417320"/>
-            <a:ext cx="5257440" cy="3931560"/>
+            <a:ext cx="5257080" cy="3931200"/>
           </a:xfrm>
           <a:prstGeom prst="roundRect">
             <a:avLst>
@@ -11473,7 +9299,7 @@
         <p:spPr>
           <a:xfrm>
             <a:off x="914400" y="1691640"/>
-            <a:ext cx="4617360" cy="411120"/>
+            <a:ext cx="4617000" cy="410760"/>
           </a:xfrm>
           <a:prstGeom prst="rect">
             <a:avLst/>
@@ -11534,7 +9360,7 @@
         <p:spPr>
           <a:xfrm>
             <a:off x="914400" y="2377440"/>
-            <a:ext cx="456840" cy="456840"/>
+            <a:ext cx="456480" cy="456480"/>
           </a:xfrm>
           <a:prstGeom prst="ellipse">
             <a:avLst/>
@@ -11581,7 +9407,7 @@
         <p:spPr>
           <a:xfrm>
             <a:off x="964800" y="2427840"/>
-            <a:ext cx="356400" cy="356400"/>
+            <a:ext cx="356040" cy="356040"/>
           </a:xfrm>
           <a:prstGeom prst="rect">
             <a:avLst/>
@@ -11601,7 +9427,7 @@
         <p:spPr>
           <a:xfrm>
             <a:off x="1554480" y="2331720"/>
-            <a:ext cx="3977280" cy="548280"/>
+            <a:ext cx="3976920" cy="547920"/>
           </a:xfrm>
           <a:prstGeom prst="rect">
             <a:avLst/>
@@ -11662,7 +9488,7 @@
         <p:spPr>
           <a:xfrm>
             <a:off x="914400" y="3127320"/>
-            <a:ext cx="456840" cy="456840"/>
+            <a:ext cx="456480" cy="456480"/>
           </a:xfrm>
           <a:prstGeom prst="ellipse">
             <a:avLst/>
@@ -11709,7 +9535,7 @@
         <p:spPr>
           <a:xfrm>
             <a:off x="964800" y="3177720"/>
-            <a:ext cx="356400" cy="356400"/>
+            <a:ext cx="356040" cy="356040"/>
           </a:xfrm>
           <a:prstGeom prst="rect">
             <a:avLst/>
@@ -11729,7 +9555,7 @@
         <p:spPr>
           <a:xfrm>
             <a:off x="1554480" y="3081600"/>
-            <a:ext cx="3977280" cy="548280"/>
+            <a:ext cx="3976920" cy="547920"/>
           </a:xfrm>
           <a:prstGeom prst="rect">
             <a:avLst/>
@@ -11790,7 +9616,7 @@
         <p:spPr>
           <a:xfrm>
             <a:off x="914400" y="3877200"/>
-            <a:ext cx="456840" cy="456840"/>
+            <a:ext cx="456480" cy="456480"/>
           </a:xfrm>
           <a:prstGeom prst="ellipse">
             <a:avLst/>
@@ -11837,7 +9663,7 @@
         <p:spPr>
           <a:xfrm>
             <a:off x="964800" y="3927240"/>
-            <a:ext cx="356400" cy="356400"/>
+            <a:ext cx="356040" cy="356040"/>
           </a:xfrm>
           <a:prstGeom prst="rect">
             <a:avLst/>
@@ -11857,7 +9683,7 @@
         <p:spPr>
           <a:xfrm>
             <a:off x="1554480" y="3831480"/>
-            <a:ext cx="3977280" cy="548280"/>
+            <a:ext cx="3976920" cy="547920"/>
           </a:xfrm>
           <a:prstGeom prst="rect">
             <a:avLst/>
@@ -11918,7 +9744,7 @@
         <p:spPr>
           <a:xfrm>
             <a:off x="914400" y="4626720"/>
-            <a:ext cx="456840" cy="456840"/>
+            <a:ext cx="456480" cy="456480"/>
           </a:xfrm>
           <a:prstGeom prst="ellipse">
             <a:avLst/>
@@ -11965,7 +9791,7 @@
         <p:spPr>
           <a:xfrm>
             <a:off x="964800" y="4677120"/>
-            <a:ext cx="356400" cy="356400"/>
+            <a:ext cx="356040" cy="356040"/>
           </a:xfrm>
           <a:prstGeom prst="rect">
             <a:avLst/>
@@ -11985,7 +9811,7 @@
         <p:spPr>
           <a:xfrm>
             <a:off x="1554480" y="4581000"/>
-            <a:ext cx="3977280" cy="548280"/>
+            <a:ext cx="3976920" cy="547920"/>
           </a:xfrm>
           <a:prstGeom prst="rect">
             <a:avLst/>
@@ -12046,7 +9872,7 @@
         <p:spPr>
           <a:xfrm>
             <a:off x="6172200" y="1417320"/>
-            <a:ext cx="5257440" cy="3931560"/>
+            <a:ext cx="5257080" cy="3931200"/>
           </a:xfrm>
           <a:prstGeom prst="roundRect">
             <a:avLst>
@@ -12101,7 +9927,7 @@
         <p:spPr>
           <a:xfrm>
             <a:off x="6492240" y="1691640"/>
-            <a:ext cx="4617360" cy="411120"/>
+            <a:ext cx="4617000" cy="410760"/>
           </a:xfrm>
           <a:prstGeom prst="rect">
             <a:avLst/>
@@ -12162,7 +9988,7 @@
         <p:spPr>
           <a:xfrm>
             <a:off x="6492240" y="2377440"/>
-            <a:ext cx="456840" cy="456840"/>
+            <a:ext cx="456480" cy="456480"/>
           </a:xfrm>
           <a:prstGeom prst="ellipse">
             <a:avLst/>
@@ -12209,7 +10035,7 @@
         <p:spPr>
           <a:xfrm>
             <a:off x="6542640" y="2427840"/>
-            <a:ext cx="356400" cy="356400"/>
+            <a:ext cx="356040" cy="356040"/>
           </a:xfrm>
           <a:prstGeom prst="rect">
             <a:avLst/>
@@ -12229,7 +10055,7 @@
         <p:spPr>
           <a:xfrm>
             <a:off x="7132320" y="2331720"/>
-            <a:ext cx="3977280" cy="548280"/>
+            <a:ext cx="3976920" cy="547920"/>
           </a:xfrm>
           <a:prstGeom prst="rect">
             <a:avLst/>
@@ -12290,7 +10116,7 @@
         <p:spPr>
           <a:xfrm>
             <a:off x="6492240" y="3127320"/>
-            <a:ext cx="456840" cy="456840"/>
+            <a:ext cx="456480" cy="456480"/>
           </a:xfrm>
           <a:prstGeom prst="ellipse">
             <a:avLst/>
@@ -12337,7 +10163,7 @@
         <p:spPr>
           <a:xfrm>
             <a:off x="6542640" y="3177720"/>
-            <a:ext cx="356400" cy="356400"/>
+            <a:ext cx="356040" cy="356040"/>
           </a:xfrm>
           <a:prstGeom prst="rect">
             <a:avLst/>
@@ -12357,7 +10183,7 @@
         <p:spPr>
           <a:xfrm>
             <a:off x="7132320" y="3081600"/>
-            <a:ext cx="3977280" cy="548280"/>
+            <a:ext cx="3976920" cy="547920"/>
           </a:xfrm>
           <a:prstGeom prst="rect">
             <a:avLst/>
@@ -12418,7 +10244,7 @@
         <p:spPr>
           <a:xfrm>
             <a:off x="6492240" y="3877200"/>
-            <a:ext cx="456840" cy="456840"/>
+            <a:ext cx="456480" cy="456480"/>
           </a:xfrm>
           <a:prstGeom prst="ellipse">
             <a:avLst/>
@@ -12465,7 +10291,7 @@
         <p:spPr>
           <a:xfrm>
             <a:off x="6542640" y="3927240"/>
-            <a:ext cx="356400" cy="356400"/>
+            <a:ext cx="356040" cy="356040"/>
           </a:xfrm>
           <a:prstGeom prst="rect">
             <a:avLst/>
@@ -12485,7 +10311,7 @@
         <p:spPr>
           <a:xfrm>
             <a:off x="7132320" y="3831480"/>
-            <a:ext cx="3977280" cy="548280"/>
+            <a:ext cx="3976920" cy="547920"/>
           </a:xfrm>
           <a:prstGeom prst="rect">
             <a:avLst/>
@@ -12546,7 +10372,7 @@
         <p:spPr>
           <a:xfrm>
             <a:off x="6492240" y="4626720"/>
-            <a:ext cx="456840" cy="456840"/>
+            <a:ext cx="456480" cy="456480"/>
           </a:xfrm>
           <a:prstGeom prst="ellipse">
             <a:avLst/>
@@ -12593,7 +10419,7 @@
         <p:spPr>
           <a:xfrm>
             <a:off x="6542640" y="4677120"/>
-            <a:ext cx="356400" cy="356400"/>
+            <a:ext cx="356040" cy="356040"/>
           </a:xfrm>
           <a:prstGeom prst="rect">
             <a:avLst/>
@@ -12613,7 +10439,7 @@
         <p:spPr>
           <a:xfrm>
             <a:off x="7132320" y="4581000"/>
-            <a:ext cx="3977280" cy="548280"/>
+            <a:ext cx="3976920" cy="547920"/>
           </a:xfrm>
           <a:prstGeom prst="rect">
             <a:avLst/>
@@ -12674,7 +10500,7 @@
         <p:spPr>
           <a:xfrm>
             <a:off x="594360" y="5532120"/>
-            <a:ext cx="10972440" cy="594000"/>
+            <a:ext cx="10972080" cy="593640"/>
           </a:xfrm>
           <a:prstGeom prst="roundRect">
             <a:avLst>
@@ -12719,7 +10545,7 @@
         <p:spPr>
           <a:xfrm>
             <a:off x="914400" y="5532120"/>
-            <a:ext cx="10332360" cy="594000"/>
+            <a:ext cx="10332000" cy="593640"/>
           </a:xfrm>
           <a:prstGeom prst="rect">
             <a:avLst/>
@@ -12780,7 +10606,7 @@
         <p:spPr>
           <a:xfrm>
             <a:off x="502920" y="6473880"/>
-            <a:ext cx="8046360" cy="228240"/>
+            <a:ext cx="8046000" cy="227880"/>
           </a:xfrm>
           <a:prstGeom prst="rect">
             <a:avLst/>
@@ -12841,7 +10667,7 @@
         <p:spPr>
           <a:xfrm>
             <a:off x="11064240" y="6446520"/>
-            <a:ext cx="548280" cy="228240"/>
+            <a:ext cx="547920" cy="227880"/>
           </a:xfrm>
           <a:prstGeom prst="rect">
             <a:avLst/>
@@ -12880,7 +10706,7 @@
                 <a:latin typeface="Aptos"/>
                 <a:ea typeface="Aptos"/>
               </a:rPr>
-              <a:t>04</a:t>
+              <a:t>05</a:t>
             </a:r>
             <a:endParaRPr lang="en-US" sz="1000" b="0" u="none" strike="noStrike">
               <a:solidFill>
@@ -12939,7 +10765,7 @@
         <p:spPr>
           <a:xfrm>
             <a:off x="0" y="0"/>
-            <a:ext cx="91080" cy="6857640"/>
+            <a:ext cx="90720" cy="6857280"/>
           </a:xfrm>
           <a:prstGeom prst="rect">
             <a:avLst/>
@@ -12958,7 +10784,7 @@
           <a:fontRef idx="minor"/>
         </p:style>
         <p:txBody>
-          <a:bodyPr lIns="90000" tIns="45000" rIns="90000" bIns="45000" anchor="t">
+          <a:bodyPr lIns="45360" tIns="45000" rIns="45360" bIns="45000" anchor="t">
             <a:noAutofit/>
           </a:bodyPr>
           <a:p>
@@ -12982,7 +10808,7 @@
         <p:spPr>
           <a:xfrm>
             <a:off x="594360" y="384120"/>
-            <a:ext cx="10789560" cy="594000"/>
+            <a:ext cx="10789200" cy="593640"/>
           </a:xfrm>
           <a:prstGeom prst="rect">
             <a:avLst/>
@@ -13043,7 +10869,7 @@
         <p:spPr>
           <a:xfrm>
             <a:off x="594360" y="1417320"/>
-            <a:ext cx="3520080" cy="3977280"/>
+            <a:ext cx="3519720" cy="3976920"/>
           </a:xfrm>
           <a:prstGeom prst="roundRect">
             <a:avLst>
@@ -13098,7 +10924,7 @@
         <p:spPr>
           <a:xfrm>
             <a:off x="868680" y="1691640"/>
-            <a:ext cx="2971440" cy="365400"/>
+            <a:ext cx="2971080" cy="365040"/>
           </a:xfrm>
           <a:prstGeom prst="roundRect">
             <a:avLst>
@@ -13143,7 +10969,7 @@
         <p:spPr>
           <a:xfrm>
             <a:off x="868680" y="1691640"/>
-            <a:ext cx="2971440" cy="365400"/>
+            <a:ext cx="2971080" cy="365040"/>
           </a:xfrm>
           <a:prstGeom prst="rect">
             <a:avLst/>
@@ -13204,7 +11030,7 @@
         <p:spPr>
           <a:xfrm>
             <a:off x="868680" y="2286000"/>
-            <a:ext cx="2971440" cy="502560"/>
+            <a:ext cx="2971080" cy="502200"/>
           </a:xfrm>
           <a:prstGeom prst="rect">
             <a:avLst/>
@@ -13265,7 +11091,7 @@
         <p:spPr>
           <a:xfrm>
             <a:off x="868680" y="2880360"/>
-            <a:ext cx="2971440" cy="1188360"/>
+            <a:ext cx="2971080" cy="1188000"/>
           </a:xfrm>
           <a:prstGeom prst="rect">
             <a:avLst/>
@@ -13435,7 +11261,7 @@
         <p:spPr>
           <a:xfrm>
             <a:off x="868680" y="4343400"/>
-            <a:ext cx="2971440" cy="914040"/>
+            <a:ext cx="2971080" cy="913680"/>
           </a:xfrm>
           <a:prstGeom prst="rect">
             <a:avLst/>
@@ -13496,7 +11322,7 @@
         <p:spPr>
           <a:xfrm>
             <a:off x="4343400" y="1417320"/>
-            <a:ext cx="3520080" cy="3977280"/>
+            <a:ext cx="3519720" cy="3976920"/>
           </a:xfrm>
           <a:prstGeom prst="roundRect">
             <a:avLst>
@@ -13551,7 +11377,7 @@
         <p:spPr>
           <a:xfrm>
             <a:off x="4617720" y="1691640"/>
-            <a:ext cx="2971440" cy="365400"/>
+            <a:ext cx="2971080" cy="365040"/>
           </a:xfrm>
           <a:prstGeom prst="roundRect">
             <a:avLst>
@@ -13596,7 +11422,7 @@
         <p:spPr>
           <a:xfrm>
             <a:off x="4617720" y="1691640"/>
-            <a:ext cx="2971440" cy="365400"/>
+            <a:ext cx="2971080" cy="365040"/>
           </a:xfrm>
           <a:prstGeom prst="rect">
             <a:avLst/>
@@ -13657,7 +11483,7 @@
         <p:spPr>
           <a:xfrm>
             <a:off x="4617720" y="2286000"/>
-            <a:ext cx="2971440" cy="502560"/>
+            <a:ext cx="2971080" cy="502200"/>
           </a:xfrm>
           <a:prstGeom prst="rect">
             <a:avLst/>
@@ -13718,7 +11544,7 @@
         <p:spPr>
           <a:xfrm>
             <a:off x="4617720" y="2880360"/>
-            <a:ext cx="2971440" cy="1188360"/>
+            <a:ext cx="2971080" cy="1188000"/>
           </a:xfrm>
           <a:prstGeom prst="rect">
             <a:avLst/>
@@ -13845,7 +11671,7 @@
         <p:spPr>
           <a:xfrm>
             <a:off x="8092440" y="1417320"/>
-            <a:ext cx="3520080" cy="3977280"/>
+            <a:ext cx="3519720" cy="3976920"/>
           </a:xfrm>
           <a:prstGeom prst="roundRect">
             <a:avLst>
@@ -13900,7 +11726,7 @@
         <p:spPr>
           <a:xfrm>
             <a:off x="8366760" y="1691640"/>
-            <a:ext cx="2971440" cy="365400"/>
+            <a:ext cx="2971080" cy="365040"/>
           </a:xfrm>
           <a:prstGeom prst="roundRect">
             <a:avLst>
@@ -13945,7 +11771,7 @@
         <p:spPr>
           <a:xfrm>
             <a:off x="8366760" y="1691640"/>
-            <a:ext cx="2971440" cy="365400"/>
+            <a:ext cx="2971080" cy="365040"/>
           </a:xfrm>
           <a:prstGeom prst="rect">
             <a:avLst/>
@@ -14006,7 +11832,7 @@
         <p:spPr>
           <a:xfrm>
             <a:off x="8366760" y="2286000"/>
-            <a:ext cx="2971440" cy="502560"/>
+            <a:ext cx="2971080" cy="502200"/>
           </a:xfrm>
           <a:prstGeom prst="rect">
             <a:avLst/>
@@ -14067,7 +11893,7 @@
         <p:spPr>
           <a:xfrm>
             <a:off x="8366760" y="2880360"/>
-            <a:ext cx="2971440" cy="1188360"/>
+            <a:ext cx="2971080" cy="1188000"/>
           </a:xfrm>
           <a:prstGeom prst="rect">
             <a:avLst/>
@@ -14194,7 +12020,7 @@
         <p:spPr>
           <a:xfrm>
             <a:off x="914400" y="5623560"/>
-            <a:ext cx="10332360" cy="639720"/>
+            <a:ext cx="10332000" cy="639360"/>
           </a:xfrm>
           <a:prstGeom prst="rect">
             <a:avLst/>
@@ -14255,7 +12081,7 @@
         <p:spPr>
           <a:xfrm>
             <a:off x="502920" y="6473880"/>
-            <a:ext cx="8046360" cy="228240"/>
+            <a:ext cx="8046000" cy="227880"/>
           </a:xfrm>
           <a:prstGeom prst="rect">
             <a:avLst/>
@@ -14316,7 +12142,7 @@
         <p:spPr>
           <a:xfrm>
             <a:off x="11064240" y="6446520"/>
-            <a:ext cx="548280" cy="228240"/>
+            <a:ext cx="547920" cy="227880"/>
           </a:xfrm>
           <a:prstGeom prst="rect">
             <a:avLst/>
@@ -14355,7 +12181,7 @@
                 <a:latin typeface="Aptos"/>
                 <a:ea typeface="Aptos"/>
               </a:rPr>
-              <a:t>05</a:t>
+              <a:t>06</a:t>
             </a:r>
             <a:endParaRPr lang="en-US" sz="1000" b="0" u="none" strike="noStrike">
               <a:solidFill>
@@ -14418,7 +12244,7 @@
         <p:spPr>
           <a:xfrm>
             <a:off x="0" y="0"/>
-            <a:ext cx="12191400" cy="6857640"/>
+            <a:ext cx="12191040" cy="6857280"/>
           </a:xfrm>
           <a:prstGeom prst="rect">
             <a:avLst/>
@@ -14438,7 +12264,7 @@
         <p:spPr>
           <a:xfrm>
             <a:off x="0" y="0"/>
-            <a:ext cx="91080" cy="6857640"/>
+            <a:ext cx="90720" cy="6857280"/>
           </a:xfrm>
           <a:prstGeom prst="rect">
             <a:avLst/>
@@ -14457,7 +12283,7 @@
           <a:fontRef idx="minor"/>
         </p:style>
         <p:txBody>
-          <a:bodyPr lIns="90000" tIns="45000" rIns="90000" bIns="45000" anchor="t">
+          <a:bodyPr lIns="45360" tIns="45000" rIns="45360" bIns="45000" anchor="t">
             <a:noAutofit/>
           </a:bodyPr>
           <a:p>
@@ -14481,7 +12307,7 @@
         <p:spPr>
           <a:xfrm>
             <a:off x="594360" y="384120"/>
-            <a:ext cx="3474360" cy="319680"/>
+            <a:ext cx="3474000" cy="319320"/>
           </a:xfrm>
           <a:prstGeom prst="rect">
             <a:avLst/>
@@ -14546,7 +12372,7 @@
         <p:spPr>
           <a:xfrm>
             <a:off x="8732520" y="384120"/>
-            <a:ext cx="2651400" cy="703800"/>
+            <a:ext cx="2651040" cy="703440"/>
           </a:xfrm>
           <a:prstGeom prst="rect">
             <a:avLst/>
@@ -14566,7 +12392,7 @@
         <p:spPr>
           <a:xfrm>
             <a:off x="621720" y="1234440"/>
-            <a:ext cx="7314840" cy="868320"/>
+            <a:ext cx="7314480" cy="867960"/>
           </a:xfrm>
           <a:prstGeom prst="rect">
             <a:avLst/>
@@ -14627,7 +12453,7 @@
         <p:spPr>
           <a:xfrm>
             <a:off x="658440" y="1965960"/>
-            <a:ext cx="9600840" cy="365400"/>
+            <a:ext cx="9600480" cy="365040"/>
           </a:xfrm>
           <a:prstGeom prst="rect">
             <a:avLst/>
@@ -14731,7 +12557,7 @@
         <p:spPr>
           <a:xfrm>
             <a:off x="658440" y="5495400"/>
-            <a:ext cx="5486040" cy="273960"/>
+            <a:ext cx="5485680" cy="273600"/>
           </a:xfrm>
           <a:prstGeom prst="rect">
             <a:avLst/>
@@ -14792,7 +12618,7 @@
         <p:spPr>
           <a:xfrm>
             <a:off x="658440" y="5769720"/>
-            <a:ext cx="9875160" cy="319680"/>
+            <a:ext cx="9874800" cy="319320"/>
           </a:xfrm>
           <a:prstGeom prst="rect">
             <a:avLst/>
